--- a/KV캐시_소개.pptx
+++ b/KV캐시_소개.pptx
@@ -502,7 +502,7 @@
           <a:p>
             <a:r>
               <a:rPr lang="en-US" dirty="0"/>
-              <a:t>KV 캐시(Key-Value Cache)는 트랜스포머 기반 LLM이 자기회귀 방식으로 토큰을 하나씩 생성할 때, 이전 토큰들의 어텐션 Key/Value 벡터를 저장해 재계산을 피하는 기법입니다. 없으면 매 토큰마다 O(n^2) 재계산이 발생하고, 있으면 새 토큰만 계산해 추론 속도가 크게 빨라집니다. 대가로 시퀀스 길이·레이어·헤드 수에 비례해 GPU 메모리를 소모합니다.</a:t>
+              <a:t>KV 캐시 구조/동작 설명 슬라이드. (1) 구조: 트랜스포머의 각 레이어(그리고 각 어텐션 헤드)마다 토큰별 Key/Value 벡터가 GPU HBM에 저장되며, 토큰이 하나 생성될 때마다 모든 레이어에 K,V가 한 칸씩 추가된다. (2) 재사용: 디코딩 시 새 토큰의 Q,K,V만 계산하고, 어텐션은 HBM에서 읽어온 K1..Kt, V1..Vt와 Q_new의 내적으로 수행 — 이전 토큰 재계산이 없어 빠르다. 계산 후 새 K,V를 캐시 끝에 추가한다. (3) 비용: 메모리 = 2 x L x H x d x t x 2바이트(FP16 기준)로 시퀀스 길이 t에 정비례. 긴 문맥에서 KV 캐시가 HBM 용량과 대역폭의 병목이 되며, 이것이 PagedAttention, MQA/GQA, KV 캐시 양자화 같은 최적화의 배경이다.</a:t>
             </a:r>
             <a:endParaRPr lang="en-US" dirty="0"/>
           </a:p>
@@ -877,42 +877,360 @@
       </p:grpSpPr>
       <p:sp>
         <p:nvSpPr>
-          <p:cNvPr id="2" name="Shape 0"/>
-          <p:cNvSpPr/>
-          <p:nvPr/>
-        </p:nvSpPr>
-        <p:spPr>
-          <a:xfrm>
-            <a:off x="0" y="0"/>
-            <a:ext cx="12188952" cy="2057400"/>
-          </a:xfrm>
-          <a:prstGeom prst="roundRect">
-            <a:avLst/>
-          </a:prstGeom>
-          <a:solidFill>
-            <a:srgbClr val="111C33"/>
-          </a:solidFill>
-          <a:ln/>
-        </p:spPr>
-      </p:sp>
-      <p:sp>
-        <p:nvSpPr>
-          <p:cNvPr id="3" name="Shape 1"/>
-          <p:cNvSpPr/>
-          <p:nvPr/>
-        </p:nvSpPr>
-        <p:spPr>
-          <a:xfrm>
-            <a:off x="548640" y="457200"/>
-            <a:ext cx="2788920" cy="384048"/>
+          <p:cNvPr id="2" name="Text 0"/>
+          <p:cNvSpPr/>
+          <p:nvPr/>
+        </p:nvSpPr>
+        <p:spPr>
+          <a:xfrm>
+            <a:off x="502920" y="256032"/>
+            <a:ext cx="11155680" cy="548640"/>
+          </a:xfrm>
+          <a:prstGeom prst="rect">
+            <a:avLst/>
+          </a:prstGeom>
+          <a:noFill/>
+          <a:ln/>
+        </p:spPr>
+        <p:txBody>
+          <a:bodyPr wrap="square" lIns="0" tIns="0" rIns="0" bIns="0" rtlCol="0" anchor="t"/>
+          <a:lstStyle/>
+          <a:p>
+            <a:pPr algn="l" indent="0" marL="0">
+              <a:lnSpc>
+                <a:spcPct val="115000"/>
+              </a:lnSpc>
+              <a:buNone/>
+            </a:pPr>
+            <a:r>
+              <a:rPr lang="en-US" sz="2800" b="1" dirty="0">
+                <a:solidFill>
+                  <a:srgbClr val="FFFFFF"/>
+                </a:solidFill>
+                <a:latin typeface="Malgun Gothic" pitchFamily="34" charset="0"/>
+                <a:ea typeface="Malgun Gothic" pitchFamily="34" charset="-122"/>
+                <a:cs typeface="Malgun Gothic" pitchFamily="34" charset="-120"/>
+              </a:rPr>
+              <a:t>그림으로 보는 </a:t>
+            </a:r>
+            <a:pPr algn="l" indent="0" marL="0">
+              <a:lnSpc>
+                <a:spcPct val="115000"/>
+              </a:lnSpc>
+              <a:buNone/>
+            </a:pPr>
+            <a:r>
+              <a:rPr lang="en-US" sz="2800" b="1" dirty="0">
+                <a:solidFill>
+                  <a:srgbClr val="34D3EE"/>
+                </a:solidFill>
+                <a:latin typeface="Malgun Gothic" pitchFamily="34" charset="0"/>
+                <a:ea typeface="Malgun Gothic" pitchFamily="34" charset="-122"/>
+                <a:cs typeface="Malgun Gothic" pitchFamily="34" charset="-120"/>
+              </a:rPr>
+              <a:t>KV 캐시</a:t>
+            </a:r>
+            <a:endParaRPr lang="en-US" sz="2800" dirty="0"/>
+          </a:p>
+        </p:txBody>
+      </p:sp>
+      <p:sp>
+        <p:nvSpPr>
+          <p:cNvPr id="3" name="Text 1"/>
+          <p:cNvSpPr/>
+          <p:nvPr/>
+        </p:nvSpPr>
+        <p:spPr>
+          <a:xfrm>
+            <a:off x="521208" y="841248"/>
+            <a:ext cx="11155680" cy="320040"/>
+          </a:xfrm>
+          <a:prstGeom prst="rect">
+            <a:avLst/>
+          </a:prstGeom>
+          <a:noFill/>
+          <a:ln/>
+        </p:spPr>
+        <p:txBody>
+          <a:bodyPr wrap="square" lIns="0" tIns="0" rIns="0" bIns="0" rtlCol="0" anchor="t"/>
+          <a:lstStyle/>
+          <a:p>
+            <a:pPr algn="l" indent="0" marL="0">
+              <a:lnSpc>
+                <a:spcPct val="115000"/>
+              </a:lnSpc>
+              <a:buNone/>
+            </a:pPr>
+            <a:r>
+              <a:rPr lang="en-US" sz="1250" dirty="0">
+                <a:solidFill>
+                  <a:srgbClr val="9FB3D1"/>
+                </a:solidFill>
+                <a:latin typeface="Malgun Gothic" pitchFamily="34" charset="0"/>
+                <a:ea typeface="Malgun Gothic" pitchFamily="34" charset="-122"/>
+                <a:cs typeface="Malgun Gothic" pitchFamily="34" charset="-120"/>
+              </a:rPr>
+              <a:t>① 구조 — 어떻게 생겼나 ② 재사용 — 어떻게 다시 쓰나 ③ 비용 — 메모리를 얼마나 차지하나</a:t>
+            </a:r>
+            <a:endParaRPr lang="en-US" sz="1250" dirty="0"/>
+          </a:p>
+        </p:txBody>
+      </p:sp>
+      <p:sp>
+        <p:nvSpPr>
+          <p:cNvPr id="4" name="Shape 2"/>
+          <p:cNvSpPr/>
+          <p:nvPr/>
+        </p:nvSpPr>
+        <p:spPr>
+          <a:xfrm>
+            <a:off x="457200" y="1207008"/>
+            <a:ext cx="5742432" cy="4160520"/>
           </a:xfrm>
           <a:prstGeom prst="roundRect">
             <a:avLst>
-              <a:gd name="adj" fmla="val 50000"/>
+              <a:gd name="adj" fmla="val 2637"/>
             </a:avLst>
           </a:prstGeom>
           <a:solidFill>
+            <a:srgbClr val="16213A"/>
+          </a:solidFill>
+          <a:ln/>
+        </p:spPr>
+      </p:sp>
+      <p:sp>
+        <p:nvSpPr>
+          <p:cNvPr id="5" name="Shape 3"/>
+          <p:cNvSpPr/>
+          <p:nvPr/>
+        </p:nvSpPr>
+        <p:spPr>
+          <a:xfrm>
+            <a:off x="6382512" y="1207008"/>
+            <a:ext cx="5349240" cy="4160520"/>
+          </a:xfrm>
+          <a:prstGeom prst="roundRect">
+            <a:avLst>
+              <a:gd name="adj" fmla="val 2637"/>
+            </a:avLst>
+          </a:prstGeom>
+          <a:solidFill>
+            <a:srgbClr val="16213A"/>
+          </a:solidFill>
+          <a:ln/>
+        </p:spPr>
+      </p:sp>
+      <p:sp>
+        <p:nvSpPr>
+          <p:cNvPr id="6" name="Shape 4"/>
+          <p:cNvSpPr/>
+          <p:nvPr/>
+        </p:nvSpPr>
+        <p:spPr>
+          <a:xfrm>
+            <a:off x="457200" y="5559552"/>
+            <a:ext cx="11274552" cy="914400"/>
+          </a:xfrm>
+          <a:prstGeom prst="roundRect">
+            <a:avLst>
+              <a:gd name="adj" fmla="val 12000"/>
+            </a:avLst>
+          </a:prstGeom>
+          <a:solidFill>
             <a:srgbClr val="1B2A4A"/>
+          </a:solidFill>
+          <a:ln/>
+        </p:spPr>
+      </p:sp>
+      <p:sp>
+        <p:nvSpPr>
+          <p:cNvPr id="7" name="Shape 5"/>
+          <p:cNvSpPr/>
+          <p:nvPr/>
+        </p:nvSpPr>
+        <p:spPr>
+          <a:xfrm>
+            <a:off x="658368" y="1371600"/>
+            <a:ext cx="310896" cy="310896"/>
+          </a:xfrm>
+          <a:prstGeom prst="ellipse">
+            <a:avLst/>
+          </a:prstGeom>
+          <a:solidFill>
+            <a:srgbClr val="34D3EE"/>
+          </a:solidFill>
+          <a:ln/>
+        </p:spPr>
+      </p:sp>
+      <p:sp>
+        <p:nvSpPr>
+          <p:cNvPr id="8" name="Text 6"/>
+          <p:cNvSpPr/>
+          <p:nvPr/>
+        </p:nvSpPr>
+        <p:spPr>
+          <a:xfrm>
+            <a:off x="658368" y="1371600"/>
+            <a:ext cx="310896" cy="310896"/>
+          </a:xfrm>
+          <a:prstGeom prst="rect">
+            <a:avLst/>
+          </a:prstGeom>
+          <a:noFill/>
+          <a:ln/>
+        </p:spPr>
+        <p:txBody>
+          <a:bodyPr wrap="square" lIns="0" tIns="0" rIns="0" bIns="0" rtlCol="0" anchor="ctr"/>
+          <a:lstStyle/>
+          <a:p>
+            <a:pPr algn="ctr" indent="0" marL="0">
+              <a:lnSpc>
+                <a:spcPct val="115000"/>
+              </a:lnSpc>
+              <a:buNone/>
+            </a:pPr>
+            <a:r>
+              <a:rPr lang="en-US" sz="1200" b="1" dirty="0">
+                <a:solidFill>
+                  <a:srgbClr val="0B1220"/>
+                </a:solidFill>
+                <a:latin typeface="Malgun Gothic" pitchFamily="34" charset="0"/>
+                <a:ea typeface="Malgun Gothic" pitchFamily="34" charset="-122"/>
+                <a:cs typeface="Malgun Gothic" pitchFamily="34" charset="-120"/>
+              </a:rPr>
+              <a:t>1</a:t>
+            </a:r>
+            <a:endParaRPr lang="en-US" sz="1200" dirty="0"/>
+          </a:p>
+        </p:txBody>
+      </p:sp>
+      <p:sp>
+        <p:nvSpPr>
+          <p:cNvPr id="9" name="Text 7"/>
+          <p:cNvSpPr/>
+          <p:nvPr/>
+        </p:nvSpPr>
+        <p:spPr>
+          <a:xfrm>
+            <a:off x="1078992" y="1344168"/>
+            <a:ext cx="4937760" cy="365760"/>
+          </a:xfrm>
+          <a:prstGeom prst="rect">
+            <a:avLst/>
+          </a:prstGeom>
+          <a:noFill/>
+          <a:ln/>
+        </p:spPr>
+        <p:txBody>
+          <a:bodyPr wrap="square" lIns="0" tIns="0" rIns="0" bIns="0" rtlCol="0" anchor="t"/>
+          <a:lstStyle/>
+          <a:p>
+            <a:pPr algn="l" indent="0" marL="0">
+              <a:lnSpc>
+                <a:spcPct val="115000"/>
+              </a:lnSpc>
+              <a:buNone/>
+            </a:pPr>
+            <a:r>
+              <a:rPr lang="en-US" sz="1500" b="1" dirty="0">
+                <a:solidFill>
+                  <a:srgbClr val="FFFFFF"/>
+                </a:solidFill>
+                <a:latin typeface="Malgun Gothic" pitchFamily="34" charset="0"/>
+                <a:ea typeface="Malgun Gothic" pitchFamily="34" charset="-122"/>
+                <a:cs typeface="Malgun Gothic" pitchFamily="34" charset="-120"/>
+              </a:rPr>
+              <a:t>구조 — GPU HBM 메모리 안에 상주</a:t>
+            </a:r>
+            <a:endParaRPr lang="en-US" sz="1500" dirty="0"/>
+          </a:p>
+        </p:txBody>
+      </p:sp>
+      <p:sp>
+        <p:nvSpPr>
+          <p:cNvPr id="10" name="Shape 8"/>
+          <p:cNvSpPr/>
+          <p:nvPr/>
+        </p:nvSpPr>
+        <p:spPr>
+          <a:xfrm>
+            <a:off x="658368" y="1810512"/>
+            <a:ext cx="5340096" cy="2697480"/>
+          </a:xfrm>
+          <a:prstGeom prst="roundRect">
+            <a:avLst>
+              <a:gd name="adj" fmla="val 2712"/>
+            </a:avLst>
+          </a:prstGeom>
+          <a:solidFill>
+            <a:srgbClr val="0B1220"/>
+          </a:solidFill>
+          <a:ln w="12700">
+            <a:solidFill>
+              <a:srgbClr val="34D3EE"/>
+            </a:solidFill>
+            <a:prstDash val="dash"/>
+          </a:ln>
+        </p:spPr>
+      </p:sp>
+      <p:sp>
+        <p:nvSpPr>
+          <p:cNvPr id="11" name="Text 9"/>
+          <p:cNvSpPr/>
+          <p:nvPr/>
+        </p:nvSpPr>
+        <p:spPr>
+          <a:xfrm>
+            <a:off x="822960" y="1883664"/>
+            <a:ext cx="2651760" cy="256032"/>
+          </a:xfrm>
+          <a:prstGeom prst="rect">
+            <a:avLst/>
+          </a:prstGeom>
+          <a:noFill/>
+          <a:ln/>
+        </p:spPr>
+        <p:txBody>
+          <a:bodyPr wrap="square" lIns="0" tIns="0" rIns="0" bIns="0" rtlCol="0" anchor="t"/>
+          <a:lstStyle/>
+          <a:p>
+            <a:pPr algn="l" indent="0" marL="0">
+              <a:lnSpc>
+                <a:spcPct val="115000"/>
+              </a:lnSpc>
+              <a:buNone/>
+            </a:pPr>
+            <a:r>
+              <a:rPr lang="en-US" sz="1100" b="1" dirty="0">
+                <a:solidFill>
+                  <a:srgbClr val="34D3EE"/>
+                </a:solidFill>
+                <a:latin typeface="Malgun Gothic" pitchFamily="34" charset="0"/>
+                <a:ea typeface="Malgun Gothic" pitchFamily="34" charset="-122"/>
+                <a:cs typeface="Malgun Gothic" pitchFamily="34" charset="-120"/>
+              </a:rPr>
+              <a:t>GPU HBM (고대역폭 메모리)</a:t>
+            </a:r>
+            <a:endParaRPr lang="en-US" sz="1100" dirty="0"/>
+          </a:p>
+        </p:txBody>
+      </p:sp>
+      <p:sp>
+        <p:nvSpPr>
+          <p:cNvPr id="12" name="Shape 10"/>
+          <p:cNvSpPr/>
+          <p:nvPr/>
+        </p:nvSpPr>
+        <p:spPr>
+          <a:xfrm>
+            <a:off x="4224528" y="1920240"/>
+            <a:ext cx="182880" cy="182880"/>
+          </a:xfrm>
+          <a:prstGeom prst="rect">
+            <a:avLst/>
+          </a:prstGeom>
+          <a:solidFill>
+            <a:srgbClr val="0F3A4A"/>
           </a:solidFill>
           <a:ln w="12700">
             <a:solidFill>
@@ -924,357 +1242,66 @@
       </p:sp>
       <p:sp>
         <p:nvSpPr>
-          <p:cNvPr id="4" name="Text 2"/>
-          <p:cNvSpPr/>
-          <p:nvPr/>
-        </p:nvSpPr>
-        <p:spPr>
-          <a:xfrm>
-            <a:off x="548640" y="457200"/>
-            <a:ext cx="2788920" cy="384048"/>
-          </a:xfrm>
-          <a:prstGeom prst="rect">
-            <a:avLst/>
-          </a:prstGeom>
-          <a:noFill/>
-          <a:ln/>
-        </p:spPr>
-        <p:txBody>
-          <a:bodyPr wrap="square" rtlCol="0" anchor="ctr"/>
-          <a:lstStyle/>
-          <a:p>
-            <a:pPr algn="ctr" indent="0" marL="0">
-              <a:buNone/>
-            </a:pPr>
-            <a:r>
-              <a:rPr lang="en-US" sz="1150" b="1" dirty="0">
-                <a:solidFill>
-                  <a:srgbClr val="34D3EE"/>
-                </a:solidFill>
-                <a:latin typeface="Malgun Gothic" pitchFamily="34" charset="0"/>
-                <a:ea typeface="Malgun Gothic" pitchFamily="34" charset="-122"/>
-                <a:cs typeface="Malgun Gothic" pitchFamily="34" charset="-120"/>
-              </a:rPr>
-              <a:t>LLM 추론(Inference) 최적화</a:t>
-            </a:r>
-            <a:endParaRPr lang="en-US" sz="1150" dirty="0"/>
-          </a:p>
-        </p:txBody>
-      </p:sp>
-      <p:sp>
-        <p:nvSpPr>
-          <p:cNvPr id="5" name="Text 3"/>
-          <p:cNvSpPr/>
-          <p:nvPr/>
-        </p:nvSpPr>
-        <p:spPr>
-          <a:xfrm>
-            <a:off x="530352" y="896112"/>
-            <a:ext cx="11064240" cy="777240"/>
-          </a:xfrm>
-          <a:prstGeom prst="rect">
-            <a:avLst/>
-          </a:prstGeom>
-          <a:noFill/>
-          <a:ln/>
-        </p:spPr>
-        <p:txBody>
-          <a:bodyPr wrap="square" lIns="0" tIns="0" rIns="0" bIns="0" rtlCol="0" anchor="ctr"/>
-          <a:lstStyle/>
-          <a:p>
-            <a:pPr indent="0" marL="0">
-              <a:buNone/>
-            </a:pPr>
-            <a:r>
-              <a:rPr lang="en-US" sz="4000" b="1" dirty="0">
-                <a:solidFill>
-                  <a:srgbClr val="34D3EE"/>
-                </a:solidFill>
-                <a:latin typeface="Malgun Gothic" pitchFamily="34" charset="0"/>
-                <a:ea typeface="Malgun Gothic" pitchFamily="34" charset="-122"/>
-                <a:cs typeface="Malgun Gothic" pitchFamily="34" charset="-120"/>
-              </a:rPr>
-              <a:t>KV 캐시</a:t>
-            </a:r>
-            <a:pPr indent="0" marL="0">
-              <a:buNone/>
-            </a:pPr>
-            <a:r>
-              <a:rPr lang="en-US" sz="4000" b="1" dirty="0">
-                <a:solidFill>
-                  <a:srgbClr val="FFFFFF"/>
-                </a:solidFill>
-                <a:latin typeface="Malgun Gothic" pitchFamily="34" charset="0"/>
-                <a:ea typeface="Malgun Gothic" pitchFamily="34" charset="-122"/>
-                <a:cs typeface="Malgun Gothic" pitchFamily="34" charset="-120"/>
-              </a:rPr>
-              <a:t>란 무엇인가요?</a:t>
-            </a:r>
-            <a:endParaRPr lang="en-US" sz="4000" dirty="0"/>
-          </a:p>
-        </p:txBody>
-      </p:sp>
-      <p:sp>
-        <p:nvSpPr>
-          <p:cNvPr id="6" name="Text 4"/>
-          <p:cNvSpPr/>
-          <p:nvPr/>
-        </p:nvSpPr>
-        <p:spPr>
-          <a:xfrm>
-            <a:off x="548640" y="1572768"/>
-            <a:ext cx="11064240" cy="457200"/>
-          </a:xfrm>
-          <a:prstGeom prst="rect">
-            <a:avLst/>
-          </a:prstGeom>
-          <a:noFill/>
-          <a:ln/>
-        </p:spPr>
-        <p:txBody>
-          <a:bodyPr wrap="square" lIns="0" tIns="0" rIns="0" bIns="0" rtlCol="0" anchor="ctr"/>
-          <a:lstStyle/>
-          <a:p>
-            <a:pPr indent="0" marL="0">
-              <a:buNone/>
-            </a:pPr>
-            <a:r>
-              <a:rPr lang="en-US" sz="1700" dirty="0">
-                <a:solidFill>
-                  <a:srgbClr val="FFFFFF"/>
-                </a:solidFill>
-                <a:latin typeface="Malgun Gothic" pitchFamily="34" charset="0"/>
-                <a:ea typeface="Malgun Gothic" pitchFamily="34" charset="-122"/>
-                <a:cs typeface="Malgun Gothic" pitchFamily="34" charset="-120"/>
-              </a:rPr>
-              <a:t>LLM이 문장을 한 글자(</a:t>
-            </a:r>
-            <a:pPr indent="0" marL="0">
-              <a:buNone/>
-            </a:pPr>
-            <a:r>
-              <a:rPr lang="en-US" sz="1700" b="1" dirty="0">
-                <a:solidFill>
-                  <a:srgbClr val="FBBF24"/>
-                </a:solidFill>
-                <a:latin typeface="Malgun Gothic" pitchFamily="34" charset="0"/>
-                <a:ea typeface="Malgun Gothic" pitchFamily="34" charset="-122"/>
-                <a:cs typeface="Malgun Gothic" pitchFamily="34" charset="-120"/>
-              </a:rPr>
-              <a:t>토큰</a:t>
-            </a:r>
-            <a:pPr indent="0" marL="0">
-              <a:buNone/>
-            </a:pPr>
-            <a:r>
-              <a:rPr lang="en-US" sz="1700" dirty="0">
-                <a:solidFill>
-                  <a:srgbClr val="FFFFFF"/>
-                </a:solidFill>
-                <a:latin typeface="Malgun Gothic" pitchFamily="34" charset="0"/>
-                <a:ea typeface="Malgun Gothic" pitchFamily="34" charset="-122"/>
-                <a:cs typeface="Malgun Gothic" pitchFamily="34" charset="-120"/>
-              </a:rPr>
-              <a:t>)씩 만들 때, </a:t>
-            </a:r>
-            <a:pPr indent="0" marL="0">
-              <a:buNone/>
-            </a:pPr>
-            <a:r>
-              <a:rPr lang="en-US" sz="1700" b="1" dirty="0">
-                <a:solidFill>
-                  <a:srgbClr val="FFFFFF"/>
-                </a:solidFill>
-                <a:latin typeface="Malgun Gothic" pitchFamily="34" charset="0"/>
-                <a:ea typeface="Malgun Gothic" pitchFamily="34" charset="-122"/>
-                <a:cs typeface="Malgun Gothic" pitchFamily="34" charset="-120"/>
-              </a:rPr>
-              <a:t>앞서 계산한 정보를 저장해 두는 '메모장'</a:t>
-            </a:r>
-            <a:pPr indent="0" marL="0">
-              <a:buNone/>
-            </a:pPr>
-            <a:r>
-              <a:rPr lang="en-US" sz="1700" dirty="0">
-                <a:solidFill>
-                  <a:srgbClr val="FFFFFF"/>
-                </a:solidFill>
-                <a:latin typeface="Malgun Gothic" pitchFamily="34" charset="0"/>
-                <a:ea typeface="Malgun Gothic" pitchFamily="34" charset="-122"/>
-                <a:cs typeface="Malgun Gothic" pitchFamily="34" charset="-120"/>
-              </a:rPr>
-              <a:t>입니다.</a:t>
-            </a:r>
-            <a:endParaRPr lang="en-US" sz="1700" dirty="0"/>
-          </a:p>
-        </p:txBody>
-      </p:sp>
-      <p:sp>
-        <p:nvSpPr>
-          <p:cNvPr id="7" name="Shape 5"/>
-          <p:cNvSpPr/>
-          <p:nvPr/>
-        </p:nvSpPr>
-        <p:spPr>
-          <a:xfrm>
-            <a:off x="548640" y="2212848"/>
-            <a:ext cx="11091672" cy="1024128"/>
-          </a:xfrm>
-          <a:prstGeom prst="roundRect">
-            <a:avLst>
-              <a:gd name="adj" fmla="val 10714"/>
-            </a:avLst>
-          </a:prstGeom>
-          <a:solidFill>
-            <a:srgbClr val="16213A"/>
-          </a:solidFill>
-          <a:ln/>
-        </p:spPr>
-      </p:sp>
-      <p:sp>
-        <p:nvSpPr>
-          <p:cNvPr id="8" name="Shape 6"/>
-          <p:cNvSpPr/>
-          <p:nvPr/>
-        </p:nvSpPr>
-        <p:spPr>
-          <a:xfrm>
-            <a:off x="777240" y="2432304"/>
-            <a:ext cx="585216" cy="585216"/>
-          </a:xfrm>
-          <a:prstGeom prst="ellipse">
-            <a:avLst/>
-          </a:prstGeom>
-          <a:solidFill>
-            <a:srgbClr val="FBBF24"/>
-          </a:solidFill>
-          <a:ln/>
-        </p:spPr>
-      </p:sp>
-      <p:pic>
-        <p:nvPicPr>
-          <p:cNvPr id="9" name="Image 0" descr="preencoded.png">    </p:cNvPr>
-          <p:cNvPicPr>
-            <a:picLocks noChangeAspect="1"/>
-          </p:cNvPicPr>
-          <p:nvPr/>
-        </p:nvPicPr>
-        <p:blipFill>
-          <a:blip r:embed="rId1"/>
-          <a:stretch>
-            <a:fillRect/>
-          </a:stretch>
-        </p:blipFill>
-        <p:spPr>
-          <a:xfrm>
-            <a:off x="905256" y="2560320"/>
-            <a:ext cx="329184" cy="329184"/>
-          </a:xfrm>
-          <a:prstGeom prst="rect">
-            <a:avLst/>
-          </a:prstGeom>
-        </p:spPr>
-      </p:pic>
-      <p:sp>
-        <p:nvSpPr>
-          <p:cNvPr id="10" name="Text 7"/>
-          <p:cNvSpPr/>
-          <p:nvPr/>
-        </p:nvSpPr>
-        <p:spPr>
-          <a:xfrm>
-            <a:off x="1572768" y="2359152"/>
-            <a:ext cx="3657600" cy="310896"/>
-          </a:xfrm>
-          <a:prstGeom prst="rect">
-            <a:avLst/>
-          </a:prstGeom>
-          <a:noFill/>
-          <a:ln/>
-        </p:spPr>
-        <p:txBody>
-          <a:bodyPr wrap="square" lIns="0" tIns="0" rIns="0" bIns="0" rtlCol="0" anchor="ctr"/>
-          <a:lstStyle/>
-          <a:p>
-            <a:pPr indent="0" marL="0">
-              <a:buNone/>
-            </a:pPr>
-            <a:r>
-              <a:rPr lang="en-US" sz="1400" b="1" dirty="0">
-                <a:solidFill>
-                  <a:srgbClr val="FBBF24"/>
-                </a:solidFill>
-                <a:latin typeface="Malgun Gothic" pitchFamily="34" charset="0"/>
-                <a:ea typeface="Malgun Gothic" pitchFamily="34" charset="-122"/>
-                <a:cs typeface="Malgun Gothic" pitchFamily="34" charset="-120"/>
-              </a:rPr>
-              <a:t>쉽게 말하면</a:t>
-            </a:r>
-            <a:endParaRPr lang="en-US" sz="1400" dirty="0"/>
-          </a:p>
-        </p:txBody>
-      </p:sp>
-      <p:sp>
-        <p:nvSpPr>
-          <p:cNvPr id="11" name="Text 8"/>
-          <p:cNvSpPr/>
-          <p:nvPr/>
-        </p:nvSpPr>
-        <p:spPr>
-          <a:xfrm>
-            <a:off x="1572768" y="2670048"/>
-            <a:ext cx="9829800" cy="457200"/>
-          </a:xfrm>
-          <a:prstGeom prst="rect">
-            <a:avLst/>
-          </a:prstGeom>
-          <a:noFill/>
-          <a:ln/>
-        </p:spPr>
-        <p:txBody>
-          <a:bodyPr wrap="square" lIns="0" tIns="0" rIns="0" bIns="0" rtlCol="0" anchor="ctr"/>
-          <a:lstStyle/>
-          <a:p>
-            <a:pPr indent="0" marL="0">
-              <a:buNone/>
-            </a:pPr>
-            <a:r>
-              <a:rPr lang="en-US" sz="1450" dirty="0">
-                <a:solidFill>
-                  <a:srgbClr val="D9E3F5"/>
-                </a:solidFill>
-                <a:latin typeface="Malgun Gothic" pitchFamily="34" charset="0"/>
-                <a:ea typeface="Malgun Gothic" pitchFamily="34" charset="-122"/>
-                <a:cs typeface="Malgun Gothic" pitchFamily="34" charset="-120"/>
-              </a:rPr>
-              <a:t>책을 한 줄 읽을 때마다 처음부터 다시 읽지 않고, 지금까지 읽은 내용을 '기억'해 두는 것과 같아요.</a:t>
-            </a:r>
-            <a:endParaRPr lang="en-US" sz="1450" dirty="0"/>
-          </a:p>
-        </p:txBody>
-      </p:sp>
-      <p:sp>
-        <p:nvSpPr>
-          <p:cNvPr id="12" name="Shape 9"/>
-          <p:cNvSpPr/>
-          <p:nvPr/>
-        </p:nvSpPr>
-        <p:spPr>
-          <a:xfrm>
-            <a:off x="548640" y="3456432"/>
-            <a:ext cx="5431536" cy="1847088"/>
-          </a:xfrm>
-          <a:prstGeom prst="roundRect">
-            <a:avLst>
-              <a:gd name="adj" fmla="val 5941"/>
-            </a:avLst>
-          </a:prstGeom>
-          <a:solidFill>
-            <a:srgbClr val="16213A"/>
+          <p:cNvPr id="13" name="Text 11"/>
+          <p:cNvSpPr/>
+          <p:nvPr/>
+        </p:nvSpPr>
+        <p:spPr>
+          <a:xfrm>
+            <a:off x="4453128" y="1883664"/>
+            <a:ext cx="457200" cy="256032"/>
+          </a:xfrm>
+          <a:prstGeom prst="rect">
+            <a:avLst/>
+          </a:prstGeom>
+          <a:noFill/>
+          <a:ln/>
+        </p:spPr>
+        <p:txBody>
+          <a:bodyPr wrap="square" lIns="0" tIns="0" rIns="0" bIns="0" rtlCol="0" anchor="t"/>
+          <a:lstStyle/>
+          <a:p>
+            <a:pPr algn="l" indent="0" marL="0">
+              <a:lnSpc>
+                <a:spcPct val="115000"/>
+              </a:lnSpc>
+              <a:buNone/>
+            </a:pPr>
+            <a:r>
+              <a:rPr lang="en-US" sz="950" dirty="0">
+                <a:solidFill>
+                  <a:srgbClr val="9FB3D1"/>
+                </a:solidFill>
+                <a:latin typeface="Malgun Gothic" pitchFamily="34" charset="0"/>
+                <a:ea typeface="Malgun Gothic" pitchFamily="34" charset="-122"/>
+                <a:cs typeface="Malgun Gothic" pitchFamily="34" charset="-120"/>
+              </a:rPr>
+              <a:t>Key</a:t>
+            </a:r>
+            <a:endParaRPr lang="en-US" sz="950" dirty="0"/>
+          </a:p>
+        </p:txBody>
+      </p:sp>
+      <p:sp>
+        <p:nvSpPr>
+          <p:cNvPr id="14" name="Shape 12"/>
+          <p:cNvSpPr/>
+          <p:nvPr/>
+        </p:nvSpPr>
+        <p:spPr>
+          <a:xfrm>
+            <a:off x="5029200" y="1920240"/>
+            <a:ext cx="182880" cy="182880"/>
+          </a:xfrm>
+          <a:prstGeom prst="rect">
+            <a:avLst/>
+          </a:prstGeom>
+          <a:solidFill>
+            <a:srgbClr val="2B2350"/>
           </a:solidFill>
           <a:ln w="12700">
             <a:solidFill>
-              <a:srgbClr val="3A2230"/>
+              <a:srgbClr val="A78BFA"/>
             </a:solidFill>
             <a:prstDash val="solid"/>
           </a:ln>
@@ -1282,58 +1309,392 @@
       </p:sp>
       <p:sp>
         <p:nvSpPr>
-          <p:cNvPr id="13" name="Shape 10"/>
-          <p:cNvSpPr/>
-          <p:nvPr/>
-        </p:nvSpPr>
-        <p:spPr>
-          <a:xfrm>
-            <a:off x="822960" y="3749040"/>
-            <a:ext cx="566928" cy="566928"/>
-          </a:xfrm>
-          <a:prstGeom prst="ellipse">
-            <a:avLst/>
-          </a:prstGeom>
-          <a:solidFill>
-            <a:srgbClr val="2A1720"/>
-          </a:solidFill>
-          <a:ln/>
-        </p:spPr>
-      </p:sp>
-      <p:pic>
-        <p:nvPicPr>
-          <p:cNvPr id="14" name="Image 1" descr="preencoded.png">    </p:cNvPr>
-          <p:cNvPicPr>
-            <a:picLocks noChangeAspect="1"/>
-          </p:cNvPicPr>
-          <p:nvPr/>
-        </p:nvPicPr>
-        <p:blipFill>
-          <a:blip r:embed="rId2"/>
-          <a:stretch>
-            <a:fillRect/>
-          </a:stretch>
-        </p:blipFill>
-        <p:spPr>
-          <a:xfrm>
-            <a:off x="960120" y="3886200"/>
-            <a:ext cx="292608" cy="292608"/>
-          </a:xfrm>
-          <a:prstGeom prst="rect">
-            <a:avLst/>
-          </a:prstGeom>
-        </p:spPr>
-      </p:pic>
-      <p:sp>
-        <p:nvSpPr>
-          <p:cNvPr id="15" name="Text 11"/>
-          <p:cNvSpPr/>
-          <p:nvPr/>
-        </p:nvSpPr>
-        <p:spPr>
-          <a:xfrm>
-            <a:off x="1517904" y="3730752"/>
-            <a:ext cx="4242816" cy="365760"/>
+          <p:cNvPr id="15" name="Text 13"/>
+          <p:cNvSpPr/>
+          <p:nvPr/>
+        </p:nvSpPr>
+        <p:spPr>
+          <a:xfrm>
+            <a:off x="5257800" y="1883664"/>
+            <a:ext cx="548640" cy="256032"/>
+          </a:xfrm>
+          <a:prstGeom prst="rect">
+            <a:avLst/>
+          </a:prstGeom>
+          <a:noFill/>
+          <a:ln/>
+        </p:spPr>
+        <p:txBody>
+          <a:bodyPr wrap="square" lIns="0" tIns="0" rIns="0" bIns="0" rtlCol="0" anchor="t"/>
+          <a:lstStyle/>
+          <a:p>
+            <a:pPr algn="l" indent="0" marL="0">
+              <a:lnSpc>
+                <a:spcPct val="115000"/>
+              </a:lnSpc>
+              <a:buNone/>
+            </a:pPr>
+            <a:r>
+              <a:rPr lang="en-US" sz="950" dirty="0">
+                <a:solidFill>
+                  <a:srgbClr val="9FB3D1"/>
+                </a:solidFill>
+                <a:latin typeface="Malgun Gothic" pitchFamily="34" charset="0"/>
+                <a:ea typeface="Malgun Gothic" pitchFamily="34" charset="-122"/>
+                <a:cs typeface="Malgun Gothic" pitchFamily="34" charset="-120"/>
+              </a:rPr>
+              <a:t>Value</a:t>
+            </a:r>
+            <a:endParaRPr lang="en-US" sz="950" dirty="0"/>
+          </a:p>
+        </p:txBody>
+      </p:sp>
+      <p:sp>
+        <p:nvSpPr>
+          <p:cNvPr id="16" name="Text 14"/>
+          <p:cNvSpPr/>
+          <p:nvPr/>
+        </p:nvSpPr>
+        <p:spPr>
+          <a:xfrm>
+            <a:off x="1572768" y="2212848"/>
+            <a:ext cx="475488" cy="146304"/>
+          </a:xfrm>
+          <a:prstGeom prst="rect">
+            <a:avLst/>
+          </a:prstGeom>
+          <a:noFill/>
+          <a:ln/>
+        </p:spPr>
+        <p:txBody>
+          <a:bodyPr wrap="square" lIns="0" tIns="0" rIns="0" bIns="0" rtlCol="0" anchor="t"/>
+          <a:lstStyle/>
+          <a:p>
+            <a:pPr algn="ctr" indent="0" marL="0">
+              <a:lnSpc>
+                <a:spcPct val="115000"/>
+              </a:lnSpc>
+              <a:buNone/>
+            </a:pPr>
+            <a:r>
+              <a:rPr lang="en-US" sz="850" dirty="0">
+                <a:solidFill>
+                  <a:srgbClr val="9FB3D1"/>
+                </a:solidFill>
+                <a:latin typeface="Malgun Gothic" pitchFamily="34" charset="0"/>
+                <a:ea typeface="Malgun Gothic" pitchFamily="34" charset="-122"/>
+                <a:cs typeface="Malgun Gothic" pitchFamily="34" charset="-120"/>
+              </a:rPr>
+              <a:t>1</a:t>
+            </a:r>
+            <a:endParaRPr lang="en-US" sz="850" dirty="0"/>
+          </a:p>
+        </p:txBody>
+      </p:sp>
+      <p:sp>
+        <p:nvSpPr>
+          <p:cNvPr id="17" name="Text 15"/>
+          <p:cNvSpPr/>
+          <p:nvPr/>
+        </p:nvSpPr>
+        <p:spPr>
+          <a:xfrm>
+            <a:off x="2093976" y="2212848"/>
+            <a:ext cx="475488" cy="146304"/>
+          </a:xfrm>
+          <a:prstGeom prst="rect">
+            <a:avLst/>
+          </a:prstGeom>
+          <a:noFill/>
+          <a:ln/>
+        </p:spPr>
+        <p:txBody>
+          <a:bodyPr wrap="square" lIns="0" tIns="0" rIns="0" bIns="0" rtlCol="0" anchor="t"/>
+          <a:lstStyle/>
+          <a:p>
+            <a:pPr algn="ctr" indent="0" marL="0">
+              <a:lnSpc>
+                <a:spcPct val="115000"/>
+              </a:lnSpc>
+              <a:buNone/>
+            </a:pPr>
+            <a:r>
+              <a:rPr lang="en-US" sz="850" dirty="0">
+                <a:solidFill>
+                  <a:srgbClr val="9FB3D1"/>
+                </a:solidFill>
+                <a:latin typeface="Malgun Gothic" pitchFamily="34" charset="0"/>
+                <a:ea typeface="Malgun Gothic" pitchFamily="34" charset="-122"/>
+                <a:cs typeface="Malgun Gothic" pitchFamily="34" charset="-120"/>
+              </a:rPr>
+              <a:t>2</a:t>
+            </a:r>
+            <a:endParaRPr lang="en-US" sz="850" dirty="0"/>
+          </a:p>
+        </p:txBody>
+      </p:sp>
+      <p:sp>
+        <p:nvSpPr>
+          <p:cNvPr id="18" name="Text 16"/>
+          <p:cNvSpPr/>
+          <p:nvPr/>
+        </p:nvSpPr>
+        <p:spPr>
+          <a:xfrm>
+            <a:off x="2615184" y="2212848"/>
+            <a:ext cx="475488" cy="146304"/>
+          </a:xfrm>
+          <a:prstGeom prst="rect">
+            <a:avLst/>
+          </a:prstGeom>
+          <a:noFill/>
+          <a:ln/>
+        </p:spPr>
+        <p:txBody>
+          <a:bodyPr wrap="square" lIns="0" tIns="0" rIns="0" bIns="0" rtlCol="0" anchor="t"/>
+          <a:lstStyle/>
+          <a:p>
+            <a:pPr algn="ctr" indent="0" marL="0">
+              <a:lnSpc>
+                <a:spcPct val="115000"/>
+              </a:lnSpc>
+              <a:buNone/>
+            </a:pPr>
+            <a:r>
+              <a:rPr lang="en-US" sz="850" dirty="0">
+                <a:solidFill>
+                  <a:srgbClr val="9FB3D1"/>
+                </a:solidFill>
+                <a:latin typeface="Malgun Gothic" pitchFamily="34" charset="0"/>
+                <a:ea typeface="Malgun Gothic" pitchFamily="34" charset="-122"/>
+                <a:cs typeface="Malgun Gothic" pitchFamily="34" charset="-120"/>
+              </a:rPr>
+              <a:t>3</a:t>
+            </a:r>
+            <a:endParaRPr lang="en-US" sz="850" dirty="0"/>
+          </a:p>
+        </p:txBody>
+      </p:sp>
+      <p:sp>
+        <p:nvSpPr>
+          <p:cNvPr id="19" name="Text 17"/>
+          <p:cNvSpPr/>
+          <p:nvPr/>
+        </p:nvSpPr>
+        <p:spPr>
+          <a:xfrm>
+            <a:off x="3136392" y="2212848"/>
+            <a:ext cx="475488" cy="146304"/>
+          </a:xfrm>
+          <a:prstGeom prst="rect">
+            <a:avLst/>
+          </a:prstGeom>
+          <a:noFill/>
+          <a:ln/>
+        </p:spPr>
+        <p:txBody>
+          <a:bodyPr wrap="square" lIns="0" tIns="0" rIns="0" bIns="0" rtlCol="0" anchor="t"/>
+          <a:lstStyle/>
+          <a:p>
+            <a:pPr algn="ctr" indent="0" marL="0">
+              <a:lnSpc>
+                <a:spcPct val="115000"/>
+              </a:lnSpc>
+              <a:buNone/>
+            </a:pPr>
+            <a:r>
+              <a:rPr lang="en-US" sz="850" dirty="0">
+                <a:solidFill>
+                  <a:srgbClr val="9FB3D1"/>
+                </a:solidFill>
+                <a:latin typeface="Malgun Gothic" pitchFamily="34" charset="0"/>
+                <a:ea typeface="Malgun Gothic" pitchFamily="34" charset="-122"/>
+                <a:cs typeface="Malgun Gothic" pitchFamily="34" charset="-120"/>
+              </a:rPr>
+              <a:t>4</a:t>
+            </a:r>
+            <a:endParaRPr lang="en-US" sz="850" dirty="0"/>
+          </a:p>
+        </p:txBody>
+      </p:sp>
+      <p:sp>
+        <p:nvSpPr>
+          <p:cNvPr id="20" name="Text 18"/>
+          <p:cNvSpPr/>
+          <p:nvPr/>
+        </p:nvSpPr>
+        <p:spPr>
+          <a:xfrm>
+            <a:off x="3657600" y="2212848"/>
+            <a:ext cx="475488" cy="146304"/>
+          </a:xfrm>
+          <a:prstGeom prst="rect">
+            <a:avLst/>
+          </a:prstGeom>
+          <a:noFill/>
+          <a:ln/>
+        </p:spPr>
+        <p:txBody>
+          <a:bodyPr wrap="square" lIns="0" tIns="0" rIns="0" bIns="0" rtlCol="0" anchor="t"/>
+          <a:lstStyle/>
+          <a:p>
+            <a:pPr algn="ctr" indent="0" marL="0">
+              <a:lnSpc>
+                <a:spcPct val="115000"/>
+              </a:lnSpc>
+              <a:buNone/>
+            </a:pPr>
+            <a:r>
+              <a:rPr lang="en-US" sz="850" dirty="0">
+                <a:solidFill>
+                  <a:srgbClr val="9FB3D1"/>
+                </a:solidFill>
+                <a:latin typeface="Malgun Gothic" pitchFamily="34" charset="0"/>
+                <a:ea typeface="Malgun Gothic" pitchFamily="34" charset="-122"/>
+                <a:cs typeface="Malgun Gothic" pitchFamily="34" charset="-120"/>
+              </a:rPr>
+              <a:t>5</a:t>
+            </a:r>
+            <a:endParaRPr lang="en-US" sz="850" dirty="0"/>
+          </a:p>
+        </p:txBody>
+      </p:sp>
+      <p:sp>
+        <p:nvSpPr>
+          <p:cNvPr id="21" name="Text 19"/>
+          <p:cNvSpPr/>
+          <p:nvPr/>
+        </p:nvSpPr>
+        <p:spPr>
+          <a:xfrm>
+            <a:off x="4178808" y="2212848"/>
+            <a:ext cx="475488" cy="146304"/>
+          </a:xfrm>
+          <a:prstGeom prst="rect">
+            <a:avLst/>
+          </a:prstGeom>
+          <a:noFill/>
+          <a:ln/>
+        </p:spPr>
+        <p:txBody>
+          <a:bodyPr wrap="square" lIns="0" tIns="0" rIns="0" bIns="0" rtlCol="0" anchor="t"/>
+          <a:lstStyle/>
+          <a:p>
+            <a:pPr algn="ctr" indent="0" marL="0">
+              <a:lnSpc>
+                <a:spcPct val="115000"/>
+              </a:lnSpc>
+              <a:buNone/>
+            </a:pPr>
+            <a:r>
+              <a:rPr lang="en-US" sz="850" dirty="0">
+                <a:solidFill>
+                  <a:srgbClr val="9FB3D1"/>
+                </a:solidFill>
+                <a:latin typeface="Malgun Gothic" pitchFamily="34" charset="0"/>
+                <a:ea typeface="Malgun Gothic" pitchFamily="34" charset="-122"/>
+                <a:cs typeface="Malgun Gothic" pitchFamily="34" charset="-120"/>
+              </a:rPr>
+              <a:t>6</a:t>
+            </a:r>
+            <a:endParaRPr lang="en-US" sz="850" dirty="0"/>
+          </a:p>
+        </p:txBody>
+      </p:sp>
+      <p:sp>
+        <p:nvSpPr>
+          <p:cNvPr id="22" name="Text 20"/>
+          <p:cNvSpPr/>
+          <p:nvPr/>
+        </p:nvSpPr>
+        <p:spPr>
+          <a:xfrm>
+            <a:off x="4700016" y="2212848"/>
+            <a:ext cx="475488" cy="146304"/>
+          </a:xfrm>
+          <a:prstGeom prst="rect">
+            <a:avLst/>
+          </a:prstGeom>
+          <a:noFill/>
+          <a:ln/>
+        </p:spPr>
+        <p:txBody>
+          <a:bodyPr wrap="square" lIns="0" tIns="0" rIns="0" bIns="0" rtlCol="0" anchor="t"/>
+          <a:lstStyle/>
+          <a:p>
+            <a:pPr algn="ctr" indent="0" marL="0">
+              <a:lnSpc>
+                <a:spcPct val="115000"/>
+              </a:lnSpc>
+              <a:buNone/>
+            </a:pPr>
+            <a:r>
+              <a:rPr lang="en-US" sz="850" b="1" dirty="0">
+                <a:solidFill>
+                  <a:srgbClr val="FBBF24"/>
+                </a:solidFill>
+                <a:latin typeface="Malgun Gothic" pitchFamily="34" charset="0"/>
+                <a:ea typeface="Malgun Gothic" pitchFamily="34" charset="-122"/>
+                <a:cs typeface="Malgun Gothic" pitchFamily="34" charset="-120"/>
+              </a:rPr>
+              <a:t>+1</a:t>
+            </a:r>
+            <a:endParaRPr lang="en-US" sz="850" dirty="0"/>
+          </a:p>
+        </p:txBody>
+      </p:sp>
+      <p:sp>
+        <p:nvSpPr>
+          <p:cNvPr id="23" name="Text 21"/>
+          <p:cNvSpPr/>
+          <p:nvPr/>
+        </p:nvSpPr>
+        <p:spPr>
+          <a:xfrm>
+            <a:off x="768096" y="2542032"/>
+            <a:ext cx="731520" cy="274320"/>
+          </a:xfrm>
+          <a:prstGeom prst="rect">
+            <a:avLst/>
+          </a:prstGeom>
+          <a:noFill/>
+          <a:ln/>
+        </p:spPr>
+        <p:txBody>
+          <a:bodyPr wrap="square" lIns="0" tIns="0" rIns="0" bIns="0" rtlCol="0" anchor="t"/>
+          <a:lstStyle/>
+          <a:p>
+            <a:pPr algn="l" indent="0" marL="0">
+              <a:lnSpc>
+                <a:spcPct val="115000"/>
+              </a:lnSpc>
+              <a:buNone/>
+            </a:pPr>
+            <a:r>
+              <a:rPr lang="en-US" sz="1000" dirty="0">
+                <a:solidFill>
+                  <a:srgbClr val="9FB3D1"/>
+                </a:solidFill>
+                <a:latin typeface="Malgun Gothic" pitchFamily="34" charset="0"/>
+                <a:ea typeface="Malgun Gothic" pitchFamily="34" charset="-122"/>
+                <a:cs typeface="Malgun Gothic" pitchFamily="34" charset="-120"/>
+              </a:rPr>
+              <a:t>Layer 1</a:t>
+            </a:r>
+            <a:endParaRPr lang="en-US" sz="1000" dirty="0"/>
+          </a:p>
+        </p:txBody>
+      </p:sp>
+      <p:sp>
+        <p:nvSpPr>
+          <p:cNvPr id="24" name="Text 22"/>
+          <p:cNvSpPr/>
+          <p:nvPr/>
+        </p:nvSpPr>
+        <p:spPr>
+          <a:xfrm>
+            <a:off x="1371600" y="2395728"/>
+            <a:ext cx="164592" cy="256032"/>
           </a:xfrm>
           <a:prstGeom prst="rect">
             <a:avLst/>
@@ -1345,127 +1706,47 @@
           <a:bodyPr wrap="square" lIns="0" tIns="0" rIns="0" bIns="0" rtlCol="0" anchor="ctr"/>
           <a:lstStyle/>
           <a:p>
-            <a:pPr indent="0" marL="0">
-              <a:buNone/>
-            </a:pPr>
-            <a:r>
-              <a:rPr lang="en-US" sz="1800" b="1" dirty="0">
-                <a:solidFill>
-                  <a:srgbClr val="F87171"/>
-                </a:solidFill>
-                <a:latin typeface="Malgun Gothic" pitchFamily="34" charset="0"/>
-                <a:ea typeface="Malgun Gothic" pitchFamily="34" charset="-122"/>
-                <a:cs typeface="Malgun Gothic" pitchFamily="34" charset="-120"/>
-              </a:rPr>
-              <a:t>캐시가 없다면</a:t>
-            </a:r>
-            <a:endParaRPr lang="en-US" sz="1800" dirty="0"/>
-          </a:p>
-        </p:txBody>
-      </p:sp>
-      <p:sp>
-        <p:nvSpPr>
-          <p:cNvPr id="16" name="Text 12"/>
-          <p:cNvSpPr/>
-          <p:nvPr/>
-        </p:nvSpPr>
-        <p:spPr>
-          <a:xfrm>
-            <a:off x="1517904" y="4059936"/>
-            <a:ext cx="4242816" cy="274320"/>
-          </a:xfrm>
-          <a:prstGeom prst="rect">
-            <a:avLst/>
-          </a:prstGeom>
-          <a:noFill/>
-          <a:ln/>
-        </p:spPr>
-        <p:txBody>
-          <a:bodyPr wrap="square" lIns="0" tIns="0" rIns="0" bIns="0" rtlCol="0" anchor="ctr"/>
-          <a:lstStyle/>
-          <a:p>
-            <a:pPr indent="0" marL="0">
-              <a:buNone/>
-            </a:pPr>
-            <a:r>
-              <a:rPr lang="en-US" sz="1200" dirty="0">
-                <a:solidFill>
-                  <a:srgbClr val="9FB3D1"/>
-                </a:solidFill>
-                <a:latin typeface="Malgun Gothic" pitchFamily="34" charset="0"/>
-                <a:ea typeface="Malgun Gothic" pitchFamily="34" charset="-122"/>
-                <a:cs typeface="Malgun Gothic" pitchFamily="34" charset="-120"/>
-              </a:rPr>
-              <a:t>느려요</a:t>
-            </a:r>
-            <a:endParaRPr lang="en-US" sz="1200" dirty="0"/>
-          </a:p>
-        </p:txBody>
-      </p:sp>
-      <p:sp>
-        <p:nvSpPr>
-          <p:cNvPr id="17" name="Text 13"/>
-          <p:cNvSpPr/>
-          <p:nvPr/>
-        </p:nvSpPr>
-        <p:spPr>
-          <a:xfrm>
-            <a:off x="841248" y="4425696"/>
-            <a:ext cx="4846320" cy="749808"/>
-          </a:xfrm>
-          <a:prstGeom prst="rect">
-            <a:avLst/>
-          </a:prstGeom>
-          <a:noFill/>
-          <a:ln/>
-        </p:spPr>
-        <p:txBody>
-          <a:bodyPr wrap="square" lIns="0" tIns="0" rIns="0" bIns="0" rtlCol="0" anchor="t"/>
-          <a:lstStyle/>
-          <a:p>
-            <a:pPr indent="0" marL="0">
-              <a:lnSpc>
-                <a:spcPct val="105000"/>
-              </a:lnSpc>
-              <a:buNone/>
-            </a:pPr>
-            <a:r>
-              <a:rPr lang="en-US" sz="1350" dirty="0">
-                <a:solidFill>
-                  <a:srgbClr val="D9E3F5"/>
-                </a:solidFill>
-                <a:latin typeface="Malgun Gothic" pitchFamily="34" charset="0"/>
-                <a:ea typeface="Malgun Gothic" pitchFamily="34" charset="-122"/>
-                <a:cs typeface="Malgun Gothic" pitchFamily="34" charset="-120"/>
-              </a:rPr>
-              <a:t>새 토큰을 만들 때마다 이전 토큰 전부를 처음부터 다시 계산 → 문장이 길어질수록 점점 느려집니다.</a:t>
-            </a:r>
-            <a:endParaRPr lang="en-US" sz="1350" dirty="0"/>
-          </a:p>
-        </p:txBody>
-      </p:sp>
-      <p:sp>
-        <p:nvSpPr>
-          <p:cNvPr id="18" name="Shape 14"/>
-          <p:cNvSpPr/>
-          <p:nvPr/>
-        </p:nvSpPr>
-        <p:spPr>
-          <a:xfrm>
-            <a:off x="6208776" y="3456432"/>
-            <a:ext cx="5431536" cy="1847088"/>
-          </a:xfrm>
-          <a:prstGeom prst="roundRect">
-            <a:avLst>
-              <a:gd name="adj" fmla="val 5941"/>
-            </a:avLst>
-          </a:prstGeom>
-          <a:solidFill>
-            <a:srgbClr val="16213A"/>
-          </a:solidFill>
-          <a:ln w="12700">
+            <a:pPr algn="l" indent="0" marL="0">
+              <a:lnSpc>
+                <a:spcPct val="115000"/>
+              </a:lnSpc>
+              <a:buNone/>
+            </a:pPr>
+            <a:r>
+              <a:rPr lang="en-US" sz="950" b="1" dirty="0">
+                <a:solidFill>
+                  <a:srgbClr val="34D3EE"/>
+                </a:solidFill>
+                <a:latin typeface="Malgun Gothic" pitchFamily="34" charset="0"/>
+                <a:ea typeface="Malgun Gothic" pitchFamily="34" charset="-122"/>
+                <a:cs typeface="Malgun Gothic" pitchFamily="34" charset="-120"/>
+              </a:rPr>
+              <a:t>K</a:t>
+            </a:r>
+            <a:endParaRPr lang="en-US" sz="950" dirty="0"/>
+          </a:p>
+        </p:txBody>
+      </p:sp>
+      <p:sp>
+        <p:nvSpPr>
+          <p:cNvPr id="25" name="Shape 23"/>
+          <p:cNvSpPr/>
+          <p:nvPr/>
+        </p:nvSpPr>
+        <p:spPr>
+          <a:xfrm>
+            <a:off x="1572768" y="2395728"/>
+            <a:ext cx="475488" cy="256032"/>
+          </a:xfrm>
+          <a:prstGeom prst="rect">
+            <a:avLst/>
+          </a:prstGeom>
+          <a:solidFill>
+            <a:srgbClr val="0F3A4A"/>
+          </a:solidFill>
+          <a:ln w="9525">
             <a:solidFill>
-              <a:srgbClr val="1E3A2E"/>
+              <a:srgbClr val="34D3EE"/>
             </a:solidFill>
             <a:prstDash val="solid"/>
           </a:ln>
@@ -1473,58 +1754,1015 @@
       </p:sp>
       <p:sp>
         <p:nvSpPr>
-          <p:cNvPr id="19" name="Shape 15"/>
-          <p:cNvSpPr/>
-          <p:nvPr/>
-        </p:nvSpPr>
-        <p:spPr>
-          <a:xfrm>
-            <a:off x="6483096" y="3749040"/>
-            <a:ext cx="566928" cy="566928"/>
+          <p:cNvPr id="26" name="Shape 24"/>
+          <p:cNvSpPr/>
+          <p:nvPr/>
+        </p:nvSpPr>
+        <p:spPr>
+          <a:xfrm>
+            <a:off x="2093976" y="2395728"/>
+            <a:ext cx="475488" cy="256032"/>
+          </a:xfrm>
+          <a:prstGeom prst="rect">
+            <a:avLst/>
+          </a:prstGeom>
+          <a:solidFill>
+            <a:srgbClr val="0F3A4A"/>
+          </a:solidFill>
+          <a:ln w="9525">
+            <a:solidFill>
+              <a:srgbClr val="34D3EE"/>
+            </a:solidFill>
+            <a:prstDash val="solid"/>
+          </a:ln>
+        </p:spPr>
+      </p:sp>
+      <p:sp>
+        <p:nvSpPr>
+          <p:cNvPr id="27" name="Shape 25"/>
+          <p:cNvSpPr/>
+          <p:nvPr/>
+        </p:nvSpPr>
+        <p:spPr>
+          <a:xfrm>
+            <a:off x="2615184" y="2395728"/>
+            <a:ext cx="475488" cy="256032"/>
+          </a:xfrm>
+          <a:prstGeom prst="rect">
+            <a:avLst/>
+          </a:prstGeom>
+          <a:solidFill>
+            <a:srgbClr val="0F3A4A"/>
+          </a:solidFill>
+          <a:ln w="9525">
+            <a:solidFill>
+              <a:srgbClr val="34D3EE"/>
+            </a:solidFill>
+            <a:prstDash val="solid"/>
+          </a:ln>
+        </p:spPr>
+      </p:sp>
+      <p:sp>
+        <p:nvSpPr>
+          <p:cNvPr id="28" name="Shape 26"/>
+          <p:cNvSpPr/>
+          <p:nvPr/>
+        </p:nvSpPr>
+        <p:spPr>
+          <a:xfrm>
+            <a:off x="3136392" y="2395728"/>
+            <a:ext cx="475488" cy="256032"/>
+          </a:xfrm>
+          <a:prstGeom prst="rect">
+            <a:avLst/>
+          </a:prstGeom>
+          <a:solidFill>
+            <a:srgbClr val="0F3A4A"/>
+          </a:solidFill>
+          <a:ln w="9525">
+            <a:solidFill>
+              <a:srgbClr val="34D3EE"/>
+            </a:solidFill>
+            <a:prstDash val="solid"/>
+          </a:ln>
+        </p:spPr>
+      </p:sp>
+      <p:sp>
+        <p:nvSpPr>
+          <p:cNvPr id="29" name="Shape 27"/>
+          <p:cNvSpPr/>
+          <p:nvPr/>
+        </p:nvSpPr>
+        <p:spPr>
+          <a:xfrm>
+            <a:off x="3657600" y="2395728"/>
+            <a:ext cx="475488" cy="256032"/>
+          </a:xfrm>
+          <a:prstGeom prst="rect">
+            <a:avLst/>
+          </a:prstGeom>
+          <a:solidFill>
+            <a:srgbClr val="0F3A4A"/>
+          </a:solidFill>
+          <a:ln w="9525">
+            <a:solidFill>
+              <a:srgbClr val="34D3EE"/>
+            </a:solidFill>
+            <a:prstDash val="solid"/>
+          </a:ln>
+        </p:spPr>
+      </p:sp>
+      <p:sp>
+        <p:nvSpPr>
+          <p:cNvPr id="30" name="Shape 28"/>
+          <p:cNvSpPr/>
+          <p:nvPr/>
+        </p:nvSpPr>
+        <p:spPr>
+          <a:xfrm>
+            <a:off x="4178808" y="2395728"/>
+            <a:ext cx="475488" cy="256032"/>
+          </a:xfrm>
+          <a:prstGeom prst="rect">
+            <a:avLst/>
+          </a:prstGeom>
+          <a:solidFill>
+            <a:srgbClr val="34D3EE"/>
+          </a:solidFill>
+          <a:ln w="9525">
+            <a:solidFill>
+              <a:srgbClr val="34D3EE"/>
+            </a:solidFill>
+            <a:prstDash val="solid"/>
+          </a:ln>
+        </p:spPr>
+      </p:sp>
+      <p:sp>
+        <p:nvSpPr>
+          <p:cNvPr id="31" name="Shape 29"/>
+          <p:cNvSpPr/>
+          <p:nvPr/>
+        </p:nvSpPr>
+        <p:spPr>
+          <a:xfrm>
+            <a:off x="4700016" y="2395728"/>
+            <a:ext cx="475488" cy="256032"/>
+          </a:xfrm>
+          <a:prstGeom prst="rect">
+            <a:avLst/>
+          </a:prstGeom>
+          <a:ln w="12700">
+            <a:solidFill>
+              <a:srgbClr val="34D3EE"/>
+            </a:solidFill>
+            <a:prstDash val="dash"/>
+          </a:ln>
+        </p:spPr>
+      </p:sp>
+      <p:sp>
+        <p:nvSpPr>
+          <p:cNvPr id="32" name="Text 30"/>
+          <p:cNvSpPr/>
+          <p:nvPr/>
+        </p:nvSpPr>
+        <p:spPr>
+          <a:xfrm>
+            <a:off x="1371600" y="2697480"/>
+            <a:ext cx="164592" cy="256032"/>
+          </a:xfrm>
+          <a:prstGeom prst="rect">
+            <a:avLst/>
+          </a:prstGeom>
+          <a:noFill/>
+          <a:ln/>
+        </p:spPr>
+        <p:txBody>
+          <a:bodyPr wrap="square" lIns="0" tIns="0" rIns="0" bIns="0" rtlCol="0" anchor="ctr"/>
+          <a:lstStyle/>
+          <a:p>
+            <a:pPr algn="l" indent="0" marL="0">
+              <a:lnSpc>
+                <a:spcPct val="115000"/>
+              </a:lnSpc>
+              <a:buNone/>
+            </a:pPr>
+            <a:r>
+              <a:rPr lang="en-US" sz="950" b="1" dirty="0">
+                <a:solidFill>
+                  <a:srgbClr val="A78BFA"/>
+                </a:solidFill>
+                <a:latin typeface="Malgun Gothic" pitchFamily="34" charset="0"/>
+                <a:ea typeface="Malgun Gothic" pitchFamily="34" charset="-122"/>
+                <a:cs typeface="Malgun Gothic" pitchFamily="34" charset="-120"/>
+              </a:rPr>
+              <a:t>V</a:t>
+            </a:r>
+            <a:endParaRPr lang="en-US" sz="950" dirty="0"/>
+          </a:p>
+        </p:txBody>
+      </p:sp>
+      <p:sp>
+        <p:nvSpPr>
+          <p:cNvPr id="33" name="Shape 31"/>
+          <p:cNvSpPr/>
+          <p:nvPr/>
+        </p:nvSpPr>
+        <p:spPr>
+          <a:xfrm>
+            <a:off x="1572768" y="2697480"/>
+            <a:ext cx="475488" cy="256032"/>
+          </a:xfrm>
+          <a:prstGeom prst="rect">
+            <a:avLst/>
+          </a:prstGeom>
+          <a:solidFill>
+            <a:srgbClr val="2B2350"/>
+          </a:solidFill>
+          <a:ln w="9525">
+            <a:solidFill>
+              <a:srgbClr val="A78BFA"/>
+            </a:solidFill>
+            <a:prstDash val="solid"/>
+          </a:ln>
+        </p:spPr>
+      </p:sp>
+      <p:sp>
+        <p:nvSpPr>
+          <p:cNvPr id="34" name="Shape 32"/>
+          <p:cNvSpPr/>
+          <p:nvPr/>
+        </p:nvSpPr>
+        <p:spPr>
+          <a:xfrm>
+            <a:off x="2093976" y="2697480"/>
+            <a:ext cx="475488" cy="256032"/>
+          </a:xfrm>
+          <a:prstGeom prst="rect">
+            <a:avLst/>
+          </a:prstGeom>
+          <a:solidFill>
+            <a:srgbClr val="2B2350"/>
+          </a:solidFill>
+          <a:ln w="9525">
+            <a:solidFill>
+              <a:srgbClr val="A78BFA"/>
+            </a:solidFill>
+            <a:prstDash val="solid"/>
+          </a:ln>
+        </p:spPr>
+      </p:sp>
+      <p:sp>
+        <p:nvSpPr>
+          <p:cNvPr id="35" name="Shape 33"/>
+          <p:cNvSpPr/>
+          <p:nvPr/>
+        </p:nvSpPr>
+        <p:spPr>
+          <a:xfrm>
+            <a:off x="2615184" y="2697480"/>
+            <a:ext cx="475488" cy="256032"/>
+          </a:xfrm>
+          <a:prstGeom prst="rect">
+            <a:avLst/>
+          </a:prstGeom>
+          <a:solidFill>
+            <a:srgbClr val="2B2350"/>
+          </a:solidFill>
+          <a:ln w="9525">
+            <a:solidFill>
+              <a:srgbClr val="A78BFA"/>
+            </a:solidFill>
+            <a:prstDash val="solid"/>
+          </a:ln>
+        </p:spPr>
+      </p:sp>
+      <p:sp>
+        <p:nvSpPr>
+          <p:cNvPr id="36" name="Shape 34"/>
+          <p:cNvSpPr/>
+          <p:nvPr/>
+        </p:nvSpPr>
+        <p:spPr>
+          <a:xfrm>
+            <a:off x="3136392" y="2697480"/>
+            <a:ext cx="475488" cy="256032"/>
+          </a:xfrm>
+          <a:prstGeom prst="rect">
+            <a:avLst/>
+          </a:prstGeom>
+          <a:solidFill>
+            <a:srgbClr val="2B2350"/>
+          </a:solidFill>
+          <a:ln w="9525">
+            <a:solidFill>
+              <a:srgbClr val="A78BFA"/>
+            </a:solidFill>
+            <a:prstDash val="solid"/>
+          </a:ln>
+        </p:spPr>
+      </p:sp>
+      <p:sp>
+        <p:nvSpPr>
+          <p:cNvPr id="37" name="Shape 35"/>
+          <p:cNvSpPr/>
+          <p:nvPr/>
+        </p:nvSpPr>
+        <p:spPr>
+          <a:xfrm>
+            <a:off x="3657600" y="2697480"/>
+            <a:ext cx="475488" cy="256032"/>
+          </a:xfrm>
+          <a:prstGeom prst="rect">
+            <a:avLst/>
+          </a:prstGeom>
+          <a:solidFill>
+            <a:srgbClr val="2B2350"/>
+          </a:solidFill>
+          <a:ln w="9525">
+            <a:solidFill>
+              <a:srgbClr val="A78BFA"/>
+            </a:solidFill>
+            <a:prstDash val="solid"/>
+          </a:ln>
+        </p:spPr>
+      </p:sp>
+      <p:sp>
+        <p:nvSpPr>
+          <p:cNvPr id="38" name="Shape 36"/>
+          <p:cNvSpPr/>
+          <p:nvPr/>
+        </p:nvSpPr>
+        <p:spPr>
+          <a:xfrm>
+            <a:off x="4178808" y="2697480"/>
+            <a:ext cx="475488" cy="256032"/>
+          </a:xfrm>
+          <a:prstGeom prst="rect">
+            <a:avLst/>
+          </a:prstGeom>
+          <a:solidFill>
+            <a:srgbClr val="A78BFA"/>
+          </a:solidFill>
+          <a:ln w="9525">
+            <a:solidFill>
+              <a:srgbClr val="A78BFA"/>
+            </a:solidFill>
+            <a:prstDash val="solid"/>
+          </a:ln>
+        </p:spPr>
+      </p:sp>
+      <p:sp>
+        <p:nvSpPr>
+          <p:cNvPr id="39" name="Shape 37"/>
+          <p:cNvSpPr/>
+          <p:nvPr/>
+        </p:nvSpPr>
+        <p:spPr>
+          <a:xfrm>
+            <a:off x="4700016" y="2697480"/>
+            <a:ext cx="475488" cy="256032"/>
+          </a:xfrm>
+          <a:prstGeom prst="rect">
+            <a:avLst/>
+          </a:prstGeom>
+          <a:ln w="12700">
+            <a:solidFill>
+              <a:srgbClr val="A78BFA"/>
+            </a:solidFill>
+            <a:prstDash val="dash"/>
+          </a:ln>
+        </p:spPr>
+      </p:sp>
+      <p:sp>
+        <p:nvSpPr>
+          <p:cNvPr id="40" name="Text 38"/>
+          <p:cNvSpPr/>
+          <p:nvPr/>
+        </p:nvSpPr>
+        <p:spPr>
+          <a:xfrm>
+            <a:off x="768096" y="3328416"/>
+            <a:ext cx="731520" cy="274320"/>
+          </a:xfrm>
+          <a:prstGeom prst="rect">
+            <a:avLst/>
+          </a:prstGeom>
+          <a:noFill/>
+          <a:ln/>
+        </p:spPr>
+        <p:txBody>
+          <a:bodyPr wrap="square" lIns="0" tIns="0" rIns="0" bIns="0" rtlCol="0" anchor="t"/>
+          <a:lstStyle/>
+          <a:p>
+            <a:pPr algn="l" indent="0" marL="0">
+              <a:lnSpc>
+                <a:spcPct val="115000"/>
+              </a:lnSpc>
+              <a:buNone/>
+            </a:pPr>
+            <a:r>
+              <a:rPr lang="en-US" sz="1000" dirty="0">
+                <a:solidFill>
+                  <a:srgbClr val="9FB3D1"/>
+                </a:solidFill>
+                <a:latin typeface="Malgun Gothic" pitchFamily="34" charset="0"/>
+                <a:ea typeface="Malgun Gothic" pitchFamily="34" charset="-122"/>
+                <a:cs typeface="Malgun Gothic" pitchFamily="34" charset="-120"/>
+              </a:rPr>
+              <a:t>Layer 2</a:t>
+            </a:r>
+            <a:endParaRPr lang="en-US" sz="1000" dirty="0"/>
+          </a:p>
+        </p:txBody>
+      </p:sp>
+      <p:sp>
+        <p:nvSpPr>
+          <p:cNvPr id="41" name="Text 39"/>
+          <p:cNvSpPr/>
+          <p:nvPr/>
+        </p:nvSpPr>
+        <p:spPr>
+          <a:xfrm>
+            <a:off x="1371600" y="3182112"/>
+            <a:ext cx="164592" cy="256032"/>
+          </a:xfrm>
+          <a:prstGeom prst="rect">
+            <a:avLst/>
+          </a:prstGeom>
+          <a:noFill/>
+          <a:ln/>
+        </p:spPr>
+        <p:txBody>
+          <a:bodyPr wrap="square" lIns="0" tIns="0" rIns="0" bIns="0" rtlCol="0" anchor="ctr"/>
+          <a:lstStyle/>
+          <a:p>
+            <a:pPr algn="l" indent="0" marL="0">
+              <a:lnSpc>
+                <a:spcPct val="115000"/>
+              </a:lnSpc>
+              <a:buNone/>
+            </a:pPr>
+            <a:r>
+              <a:rPr lang="en-US" sz="950" b="1" dirty="0">
+                <a:solidFill>
+                  <a:srgbClr val="34D3EE"/>
+                </a:solidFill>
+                <a:latin typeface="Malgun Gothic" pitchFamily="34" charset="0"/>
+                <a:ea typeface="Malgun Gothic" pitchFamily="34" charset="-122"/>
+                <a:cs typeface="Malgun Gothic" pitchFamily="34" charset="-120"/>
+              </a:rPr>
+              <a:t>K</a:t>
+            </a:r>
+            <a:endParaRPr lang="en-US" sz="950" dirty="0"/>
+          </a:p>
+        </p:txBody>
+      </p:sp>
+      <p:sp>
+        <p:nvSpPr>
+          <p:cNvPr id="42" name="Shape 40"/>
+          <p:cNvSpPr/>
+          <p:nvPr/>
+        </p:nvSpPr>
+        <p:spPr>
+          <a:xfrm>
+            <a:off x="1572768" y="3182112"/>
+            <a:ext cx="475488" cy="256032"/>
+          </a:xfrm>
+          <a:prstGeom prst="rect">
+            <a:avLst/>
+          </a:prstGeom>
+          <a:solidFill>
+            <a:srgbClr val="0F3A4A"/>
+          </a:solidFill>
+          <a:ln w="9525">
+            <a:solidFill>
+              <a:srgbClr val="34D3EE"/>
+            </a:solidFill>
+            <a:prstDash val="solid"/>
+          </a:ln>
+        </p:spPr>
+      </p:sp>
+      <p:sp>
+        <p:nvSpPr>
+          <p:cNvPr id="43" name="Shape 41"/>
+          <p:cNvSpPr/>
+          <p:nvPr/>
+        </p:nvSpPr>
+        <p:spPr>
+          <a:xfrm>
+            <a:off x="2093976" y="3182112"/>
+            <a:ext cx="475488" cy="256032"/>
+          </a:xfrm>
+          <a:prstGeom prst="rect">
+            <a:avLst/>
+          </a:prstGeom>
+          <a:solidFill>
+            <a:srgbClr val="0F3A4A"/>
+          </a:solidFill>
+          <a:ln w="9525">
+            <a:solidFill>
+              <a:srgbClr val="34D3EE"/>
+            </a:solidFill>
+            <a:prstDash val="solid"/>
+          </a:ln>
+        </p:spPr>
+      </p:sp>
+      <p:sp>
+        <p:nvSpPr>
+          <p:cNvPr id="44" name="Shape 42"/>
+          <p:cNvSpPr/>
+          <p:nvPr/>
+        </p:nvSpPr>
+        <p:spPr>
+          <a:xfrm>
+            <a:off x="2615184" y="3182112"/>
+            <a:ext cx="475488" cy="256032"/>
+          </a:xfrm>
+          <a:prstGeom prst="rect">
+            <a:avLst/>
+          </a:prstGeom>
+          <a:solidFill>
+            <a:srgbClr val="0F3A4A"/>
+          </a:solidFill>
+          <a:ln w="9525">
+            <a:solidFill>
+              <a:srgbClr val="34D3EE"/>
+            </a:solidFill>
+            <a:prstDash val="solid"/>
+          </a:ln>
+        </p:spPr>
+      </p:sp>
+      <p:sp>
+        <p:nvSpPr>
+          <p:cNvPr id="45" name="Shape 43"/>
+          <p:cNvSpPr/>
+          <p:nvPr/>
+        </p:nvSpPr>
+        <p:spPr>
+          <a:xfrm>
+            <a:off x="3136392" y="3182112"/>
+            <a:ext cx="475488" cy="256032"/>
+          </a:xfrm>
+          <a:prstGeom prst="rect">
+            <a:avLst/>
+          </a:prstGeom>
+          <a:solidFill>
+            <a:srgbClr val="0F3A4A"/>
+          </a:solidFill>
+          <a:ln w="9525">
+            <a:solidFill>
+              <a:srgbClr val="34D3EE"/>
+            </a:solidFill>
+            <a:prstDash val="solid"/>
+          </a:ln>
+        </p:spPr>
+      </p:sp>
+      <p:sp>
+        <p:nvSpPr>
+          <p:cNvPr id="46" name="Shape 44"/>
+          <p:cNvSpPr/>
+          <p:nvPr/>
+        </p:nvSpPr>
+        <p:spPr>
+          <a:xfrm>
+            <a:off x="3657600" y="3182112"/>
+            <a:ext cx="475488" cy="256032"/>
+          </a:xfrm>
+          <a:prstGeom prst="rect">
+            <a:avLst/>
+          </a:prstGeom>
+          <a:solidFill>
+            <a:srgbClr val="0F3A4A"/>
+          </a:solidFill>
+          <a:ln w="9525">
+            <a:solidFill>
+              <a:srgbClr val="34D3EE"/>
+            </a:solidFill>
+            <a:prstDash val="solid"/>
+          </a:ln>
+        </p:spPr>
+      </p:sp>
+      <p:sp>
+        <p:nvSpPr>
+          <p:cNvPr id="47" name="Shape 45"/>
+          <p:cNvSpPr/>
+          <p:nvPr/>
+        </p:nvSpPr>
+        <p:spPr>
+          <a:xfrm>
+            <a:off x="4178808" y="3182112"/>
+            <a:ext cx="475488" cy="256032"/>
+          </a:xfrm>
+          <a:prstGeom prst="rect">
+            <a:avLst/>
+          </a:prstGeom>
+          <a:solidFill>
+            <a:srgbClr val="34D3EE"/>
+          </a:solidFill>
+          <a:ln w="9525">
+            <a:solidFill>
+              <a:srgbClr val="34D3EE"/>
+            </a:solidFill>
+            <a:prstDash val="solid"/>
+          </a:ln>
+        </p:spPr>
+      </p:sp>
+      <p:sp>
+        <p:nvSpPr>
+          <p:cNvPr id="48" name="Shape 46"/>
+          <p:cNvSpPr/>
+          <p:nvPr/>
+        </p:nvSpPr>
+        <p:spPr>
+          <a:xfrm>
+            <a:off x="4700016" y="3182112"/>
+            <a:ext cx="475488" cy="256032"/>
+          </a:xfrm>
+          <a:prstGeom prst="rect">
+            <a:avLst/>
+          </a:prstGeom>
+          <a:ln w="12700">
+            <a:solidFill>
+              <a:srgbClr val="34D3EE"/>
+            </a:solidFill>
+            <a:prstDash val="dash"/>
+          </a:ln>
+        </p:spPr>
+      </p:sp>
+      <p:sp>
+        <p:nvSpPr>
+          <p:cNvPr id="49" name="Text 47"/>
+          <p:cNvSpPr/>
+          <p:nvPr/>
+        </p:nvSpPr>
+        <p:spPr>
+          <a:xfrm>
+            <a:off x="1371600" y="3483864"/>
+            <a:ext cx="164592" cy="256032"/>
+          </a:xfrm>
+          <a:prstGeom prst="rect">
+            <a:avLst/>
+          </a:prstGeom>
+          <a:noFill/>
+          <a:ln/>
+        </p:spPr>
+        <p:txBody>
+          <a:bodyPr wrap="square" lIns="0" tIns="0" rIns="0" bIns="0" rtlCol="0" anchor="ctr"/>
+          <a:lstStyle/>
+          <a:p>
+            <a:pPr algn="l" indent="0" marL="0">
+              <a:lnSpc>
+                <a:spcPct val="115000"/>
+              </a:lnSpc>
+              <a:buNone/>
+            </a:pPr>
+            <a:r>
+              <a:rPr lang="en-US" sz="950" b="1" dirty="0">
+                <a:solidFill>
+                  <a:srgbClr val="A78BFA"/>
+                </a:solidFill>
+                <a:latin typeface="Malgun Gothic" pitchFamily="34" charset="0"/>
+                <a:ea typeface="Malgun Gothic" pitchFamily="34" charset="-122"/>
+                <a:cs typeface="Malgun Gothic" pitchFamily="34" charset="-120"/>
+              </a:rPr>
+              <a:t>V</a:t>
+            </a:r>
+            <a:endParaRPr lang="en-US" sz="950" dirty="0"/>
+          </a:p>
+        </p:txBody>
+      </p:sp>
+      <p:sp>
+        <p:nvSpPr>
+          <p:cNvPr id="50" name="Shape 48"/>
+          <p:cNvSpPr/>
+          <p:nvPr/>
+        </p:nvSpPr>
+        <p:spPr>
+          <a:xfrm>
+            <a:off x="1572768" y="3483864"/>
+            <a:ext cx="475488" cy="256032"/>
+          </a:xfrm>
+          <a:prstGeom prst="rect">
+            <a:avLst/>
+          </a:prstGeom>
+          <a:solidFill>
+            <a:srgbClr val="2B2350"/>
+          </a:solidFill>
+          <a:ln w="9525">
+            <a:solidFill>
+              <a:srgbClr val="A78BFA"/>
+            </a:solidFill>
+            <a:prstDash val="solid"/>
+          </a:ln>
+        </p:spPr>
+      </p:sp>
+      <p:sp>
+        <p:nvSpPr>
+          <p:cNvPr id="51" name="Shape 49"/>
+          <p:cNvSpPr/>
+          <p:nvPr/>
+        </p:nvSpPr>
+        <p:spPr>
+          <a:xfrm>
+            <a:off x="2093976" y="3483864"/>
+            <a:ext cx="475488" cy="256032"/>
+          </a:xfrm>
+          <a:prstGeom prst="rect">
+            <a:avLst/>
+          </a:prstGeom>
+          <a:solidFill>
+            <a:srgbClr val="2B2350"/>
+          </a:solidFill>
+          <a:ln w="9525">
+            <a:solidFill>
+              <a:srgbClr val="A78BFA"/>
+            </a:solidFill>
+            <a:prstDash val="solid"/>
+          </a:ln>
+        </p:spPr>
+      </p:sp>
+      <p:sp>
+        <p:nvSpPr>
+          <p:cNvPr id="52" name="Shape 50"/>
+          <p:cNvSpPr/>
+          <p:nvPr/>
+        </p:nvSpPr>
+        <p:spPr>
+          <a:xfrm>
+            <a:off x="2615184" y="3483864"/>
+            <a:ext cx="475488" cy="256032"/>
+          </a:xfrm>
+          <a:prstGeom prst="rect">
+            <a:avLst/>
+          </a:prstGeom>
+          <a:solidFill>
+            <a:srgbClr val="2B2350"/>
+          </a:solidFill>
+          <a:ln w="9525">
+            <a:solidFill>
+              <a:srgbClr val="A78BFA"/>
+            </a:solidFill>
+            <a:prstDash val="solid"/>
+          </a:ln>
+        </p:spPr>
+      </p:sp>
+      <p:sp>
+        <p:nvSpPr>
+          <p:cNvPr id="53" name="Shape 51"/>
+          <p:cNvSpPr/>
+          <p:nvPr/>
+        </p:nvSpPr>
+        <p:spPr>
+          <a:xfrm>
+            <a:off x="3136392" y="3483864"/>
+            <a:ext cx="475488" cy="256032"/>
+          </a:xfrm>
+          <a:prstGeom prst="rect">
+            <a:avLst/>
+          </a:prstGeom>
+          <a:solidFill>
+            <a:srgbClr val="2B2350"/>
+          </a:solidFill>
+          <a:ln w="9525">
+            <a:solidFill>
+              <a:srgbClr val="A78BFA"/>
+            </a:solidFill>
+            <a:prstDash val="solid"/>
+          </a:ln>
+        </p:spPr>
+      </p:sp>
+      <p:sp>
+        <p:nvSpPr>
+          <p:cNvPr id="54" name="Shape 52"/>
+          <p:cNvSpPr/>
+          <p:nvPr/>
+        </p:nvSpPr>
+        <p:spPr>
+          <a:xfrm>
+            <a:off x="3657600" y="3483864"/>
+            <a:ext cx="475488" cy="256032"/>
+          </a:xfrm>
+          <a:prstGeom prst="rect">
+            <a:avLst/>
+          </a:prstGeom>
+          <a:solidFill>
+            <a:srgbClr val="2B2350"/>
+          </a:solidFill>
+          <a:ln w="9525">
+            <a:solidFill>
+              <a:srgbClr val="A78BFA"/>
+            </a:solidFill>
+            <a:prstDash val="solid"/>
+          </a:ln>
+        </p:spPr>
+      </p:sp>
+      <p:sp>
+        <p:nvSpPr>
+          <p:cNvPr id="55" name="Shape 53"/>
+          <p:cNvSpPr/>
+          <p:nvPr/>
+        </p:nvSpPr>
+        <p:spPr>
+          <a:xfrm>
+            <a:off x="4178808" y="3483864"/>
+            <a:ext cx="475488" cy="256032"/>
+          </a:xfrm>
+          <a:prstGeom prst="rect">
+            <a:avLst/>
+          </a:prstGeom>
+          <a:solidFill>
+            <a:srgbClr val="A78BFA"/>
+          </a:solidFill>
+          <a:ln w="9525">
+            <a:solidFill>
+              <a:srgbClr val="A78BFA"/>
+            </a:solidFill>
+            <a:prstDash val="solid"/>
+          </a:ln>
+        </p:spPr>
+      </p:sp>
+      <p:sp>
+        <p:nvSpPr>
+          <p:cNvPr id="56" name="Shape 54"/>
+          <p:cNvSpPr/>
+          <p:nvPr/>
+        </p:nvSpPr>
+        <p:spPr>
+          <a:xfrm>
+            <a:off x="4700016" y="3483864"/>
+            <a:ext cx="475488" cy="256032"/>
+          </a:xfrm>
+          <a:prstGeom prst="rect">
+            <a:avLst/>
+          </a:prstGeom>
+          <a:ln w="12700">
+            <a:solidFill>
+              <a:srgbClr val="A78BFA"/>
+            </a:solidFill>
+            <a:prstDash val="dash"/>
+          </a:ln>
+        </p:spPr>
+      </p:sp>
+      <p:sp>
+        <p:nvSpPr>
+          <p:cNvPr id="57" name="Text 55"/>
+          <p:cNvSpPr/>
+          <p:nvPr/>
+        </p:nvSpPr>
+        <p:spPr>
+          <a:xfrm>
+            <a:off x="1572768" y="3822192"/>
+            <a:ext cx="4206240" cy="256032"/>
+          </a:xfrm>
+          <a:prstGeom prst="rect">
+            <a:avLst/>
+          </a:prstGeom>
+          <a:noFill/>
+          <a:ln/>
+        </p:spPr>
+        <p:txBody>
+          <a:bodyPr wrap="square" lIns="0" tIns="0" rIns="0" bIns="0" rtlCol="0" anchor="t"/>
+          <a:lstStyle/>
+          <a:p>
+            <a:pPr algn="l" indent="0" marL="0">
+              <a:lnSpc>
+                <a:spcPct val="115000"/>
+              </a:lnSpc>
+              <a:buNone/>
+            </a:pPr>
+            <a:r>
+              <a:rPr lang="en-US" sz="1050" dirty="0">
+                <a:solidFill>
+                  <a:srgbClr val="9FB3D1"/>
+                </a:solidFill>
+                <a:latin typeface="Malgun Gothic" pitchFamily="34" charset="0"/>
+                <a:ea typeface="Malgun Gothic" pitchFamily="34" charset="-122"/>
+                <a:cs typeface="Malgun Gothic" pitchFamily="34" charset="-120"/>
+              </a:rPr>
+              <a:t>· · ·  Layer L까지 같은 그리드 반복</a:t>
+            </a:r>
+            <a:endParaRPr lang="en-US" sz="1050" dirty="0"/>
+          </a:p>
+        </p:txBody>
+      </p:sp>
+      <p:sp>
+        <p:nvSpPr>
+          <p:cNvPr id="58" name="Shape 56"/>
+          <p:cNvSpPr/>
+          <p:nvPr/>
+        </p:nvSpPr>
+        <p:spPr>
+          <a:xfrm>
+            <a:off x="1572768" y="4206240"/>
+            <a:ext cx="3602736" cy="0"/>
+          </a:xfrm>
+          <a:prstGeom prst="line">
+            <a:avLst/>
+          </a:prstGeom>
+          <a:noFill/>
+          <a:ln w="22225">
+            <a:solidFill>
+              <a:srgbClr val="34D3EE"/>
+            </a:solidFill>
+            <a:prstDash val="solid"/>
+            <a:tailEnd type="triangle"/>
+          </a:ln>
+        </p:spPr>
+      </p:sp>
+      <p:sp>
+        <p:nvSpPr>
+          <p:cNvPr id="59" name="Text 57"/>
+          <p:cNvSpPr/>
+          <p:nvPr/>
+        </p:nvSpPr>
+        <p:spPr>
+          <a:xfrm>
+            <a:off x="1572768" y="4261104"/>
+            <a:ext cx="4480560" cy="219456"/>
+          </a:xfrm>
+          <a:prstGeom prst="rect">
+            <a:avLst/>
+          </a:prstGeom>
+          <a:noFill/>
+          <a:ln/>
+        </p:spPr>
+        <p:txBody>
+          <a:bodyPr wrap="square" lIns="0" tIns="0" rIns="0" bIns="0" rtlCol="0" anchor="t"/>
+          <a:lstStyle/>
+          <a:p>
+            <a:pPr algn="l" indent="0" marL="0">
+              <a:lnSpc>
+                <a:spcPct val="115000"/>
+              </a:lnSpc>
+              <a:buNone/>
+            </a:pPr>
+            <a:r>
+              <a:rPr lang="en-US" sz="1000" dirty="0">
+                <a:solidFill>
+                  <a:srgbClr val="FBBF24"/>
+                </a:solidFill>
+                <a:latin typeface="Malgun Gothic" pitchFamily="34" charset="0"/>
+                <a:ea typeface="Malgun Gothic" pitchFamily="34" charset="-122"/>
+                <a:cs typeface="Malgun Gothic" pitchFamily="34" charset="-120"/>
+              </a:rPr>
+              <a:t>새 토큰 1개마다 → 모든 레이어에 K,V 한 칸씩 추가</a:t>
+            </a:r>
+            <a:endParaRPr lang="en-US" sz="1000" dirty="0"/>
+          </a:p>
+        </p:txBody>
+      </p:sp>
+      <p:sp>
+        <p:nvSpPr>
+          <p:cNvPr id="60" name="Text 58"/>
+          <p:cNvSpPr/>
+          <p:nvPr/>
+        </p:nvSpPr>
+        <p:spPr>
+          <a:xfrm>
+            <a:off x="658368" y="4617720"/>
+            <a:ext cx="5340096" cy="685800"/>
+          </a:xfrm>
+          <a:prstGeom prst="rect">
+            <a:avLst/>
+          </a:prstGeom>
+          <a:noFill/>
+          <a:ln/>
+        </p:spPr>
+        <p:txBody>
+          <a:bodyPr wrap="square" lIns="0" tIns="0" rIns="0" bIns="0" rtlCol="0" anchor="t"/>
+          <a:lstStyle/>
+          <a:p>
+            <a:pPr algn="l" indent="0" marL="0">
+              <a:lnSpc>
+                <a:spcPct val="125000"/>
+              </a:lnSpc>
+              <a:buNone/>
+            </a:pPr>
+            <a:r>
+              <a:rPr lang="en-US" sz="1150" dirty="0">
+                <a:solidFill>
+                  <a:srgbClr val="D9E3F5"/>
+                </a:solidFill>
+                <a:latin typeface="Malgun Gothic" pitchFamily="34" charset="0"/>
+                <a:ea typeface="Malgun Gothic" pitchFamily="34" charset="-122"/>
+                <a:cs typeface="Malgun Gothic" pitchFamily="34" charset="-120"/>
+              </a:rPr>
+              <a:t>토큰 하나마다 K(Key)·V(Value) 벡터가 레이어 수만큼 저장됩니다. 시퀀스(문맥)가 길어질수록 그리드는 오른쪽으로 계속 자랍니다.</a:t>
+            </a:r>
+            <a:endParaRPr lang="en-US" sz="1150" dirty="0"/>
+          </a:p>
+        </p:txBody>
+      </p:sp>
+      <p:sp>
+        <p:nvSpPr>
+          <p:cNvPr id="61" name="Shape 59"/>
+          <p:cNvSpPr/>
+          <p:nvPr/>
+        </p:nvSpPr>
+        <p:spPr>
+          <a:xfrm>
+            <a:off x="6583680" y="1371600"/>
+            <a:ext cx="310896" cy="310896"/>
           </a:xfrm>
           <a:prstGeom prst="ellipse">
             <a:avLst/>
           </a:prstGeom>
           <a:solidFill>
-            <a:srgbClr val="16281E"/>
-          </a:solidFill>
-          <a:ln/>
-        </p:spPr>
-      </p:sp>
-      <p:pic>
-        <p:nvPicPr>
-          <p:cNvPr id="20" name="Image 2" descr="preencoded.png">    </p:cNvPr>
-          <p:cNvPicPr>
-            <a:picLocks noChangeAspect="1"/>
-          </p:cNvPicPr>
-          <p:nvPr/>
-        </p:nvPicPr>
-        <p:blipFill>
-          <a:blip r:embed="rId3"/>
-          <a:stretch>
-            <a:fillRect/>
-          </a:stretch>
-        </p:blipFill>
-        <p:spPr>
-          <a:xfrm>
-            <a:off x="6629400" y="3877056"/>
-            <a:ext cx="274320" cy="310896"/>
-          </a:xfrm>
-          <a:prstGeom prst="rect">
-            <a:avLst/>
-          </a:prstGeom>
-        </p:spPr>
-      </p:pic>
-      <p:sp>
-        <p:nvSpPr>
-          <p:cNvPr id="21" name="Text 16"/>
-          <p:cNvSpPr/>
-          <p:nvPr/>
-        </p:nvSpPr>
-        <p:spPr>
-          <a:xfrm>
-            <a:off x="7178040" y="3730752"/>
-            <a:ext cx="4242816" cy="365760"/>
+            <a:srgbClr val="4ADE80"/>
+          </a:solidFill>
+          <a:ln/>
+        </p:spPr>
+      </p:sp>
+      <p:sp>
+        <p:nvSpPr>
+          <p:cNvPr id="62" name="Text 60"/>
+          <p:cNvSpPr/>
+          <p:nvPr/>
+        </p:nvSpPr>
+        <p:spPr>
+          <a:xfrm>
+            <a:off x="6583680" y="1371600"/>
+            <a:ext cx="310896" cy="310896"/>
           </a:xfrm>
           <a:prstGeom prst="rect">
             <a:avLst/>
@@ -1536,58 +2774,22 @@
           <a:bodyPr wrap="square" lIns="0" tIns="0" rIns="0" bIns="0" rtlCol="0" anchor="ctr"/>
           <a:lstStyle/>
           <a:p>
-            <a:pPr indent="0" marL="0">
-              <a:buNone/>
-            </a:pPr>
-            <a:r>
-              <a:rPr lang="en-US" sz="1800" b="1" dirty="0">
-                <a:solidFill>
-                  <a:srgbClr val="4ADE80"/>
-                </a:solidFill>
-                <a:latin typeface="Malgun Gothic" pitchFamily="34" charset="0"/>
-                <a:ea typeface="Malgun Gothic" pitchFamily="34" charset="-122"/>
-                <a:cs typeface="Malgun Gothic" pitchFamily="34" charset="-120"/>
-              </a:rPr>
-              <a:t>KV 캐시를 쓰면</a:t>
-            </a:r>
-            <a:endParaRPr lang="en-US" sz="1800" dirty="0"/>
-          </a:p>
-        </p:txBody>
-      </p:sp>
-      <p:sp>
-        <p:nvSpPr>
-          <p:cNvPr id="22" name="Text 17"/>
-          <p:cNvSpPr/>
-          <p:nvPr/>
-        </p:nvSpPr>
-        <p:spPr>
-          <a:xfrm>
-            <a:off x="7178040" y="4059936"/>
-            <a:ext cx="4242816" cy="274320"/>
-          </a:xfrm>
-          <a:prstGeom prst="rect">
-            <a:avLst/>
-          </a:prstGeom>
-          <a:noFill/>
-          <a:ln/>
-        </p:spPr>
-        <p:txBody>
-          <a:bodyPr wrap="square" lIns="0" tIns="0" rIns="0" bIns="0" rtlCol="0" anchor="ctr"/>
-          <a:lstStyle/>
-          <a:p>
-            <a:pPr indent="0" marL="0">
-              <a:buNone/>
-            </a:pPr>
-            <a:r>
-              <a:rPr lang="en-US" sz="1200" dirty="0">
-                <a:solidFill>
-                  <a:srgbClr val="9FB3D1"/>
-                </a:solidFill>
-                <a:latin typeface="Malgun Gothic" pitchFamily="34" charset="0"/>
-                <a:ea typeface="Malgun Gothic" pitchFamily="34" charset="-122"/>
-                <a:cs typeface="Malgun Gothic" pitchFamily="34" charset="-120"/>
-              </a:rPr>
-              <a:t>빨라요</a:t>
+            <a:pPr algn="ctr" indent="0" marL="0">
+              <a:lnSpc>
+                <a:spcPct val="115000"/>
+              </a:lnSpc>
+              <a:buNone/>
+            </a:pPr>
+            <a:r>
+              <a:rPr lang="en-US" sz="1200" b="1" dirty="0">
+                <a:solidFill>
+                  <a:srgbClr val="0B1220"/>
+                </a:solidFill>
+                <a:latin typeface="Malgun Gothic" pitchFamily="34" charset="0"/>
+                <a:ea typeface="Malgun Gothic" pitchFamily="34" charset="-122"/>
+                <a:cs typeface="Malgun Gothic" pitchFamily="34" charset="-120"/>
+              </a:rPr>
+              <a:t>2</a:t>
             </a:r>
             <a:endParaRPr lang="en-US" sz="1200" dirty="0"/>
           </a:p>
@@ -1595,14 +2797,14 @@
       </p:sp>
       <p:sp>
         <p:nvSpPr>
-          <p:cNvPr id="23" name="Text 18"/>
-          <p:cNvSpPr/>
-          <p:nvPr/>
-        </p:nvSpPr>
-        <p:spPr>
-          <a:xfrm>
-            <a:off x="6501384" y="4425696"/>
-            <a:ext cx="4846320" cy="749808"/>
+          <p:cNvPr id="63" name="Text 61"/>
+          <p:cNvSpPr/>
+          <p:nvPr/>
+        </p:nvSpPr>
+        <p:spPr>
+          <a:xfrm>
+            <a:off x="7004304" y="1344168"/>
+            <a:ext cx="4663440" cy="365760"/>
           </a:xfrm>
           <a:prstGeom prst="rect">
             <a:avLst/>
@@ -1614,75 +2816,41 @@
           <a:bodyPr wrap="square" lIns="0" tIns="0" rIns="0" bIns="0" rtlCol="0" anchor="t"/>
           <a:lstStyle/>
           <a:p>
-            <a:pPr indent="0" marL="0">
-              <a:lnSpc>
-                <a:spcPct val="105000"/>
-              </a:lnSpc>
-              <a:buNone/>
-            </a:pPr>
-            <a:r>
-              <a:rPr lang="en-US" sz="1350" dirty="0">
-                <a:solidFill>
-                  <a:srgbClr val="D9E3F5"/>
-                </a:solidFill>
-                <a:latin typeface="Malgun Gothic" pitchFamily="34" charset="0"/>
-                <a:ea typeface="Malgun Gothic" pitchFamily="34" charset="-122"/>
-                <a:cs typeface="Malgun Gothic" pitchFamily="34" charset="-120"/>
-              </a:rPr>
-              <a:t>이전 토큰의 </a:t>
-            </a:r>
-            <a:pPr indent="0" marL="0">
-              <a:lnSpc>
-                <a:spcPct val="105000"/>
-              </a:lnSpc>
-              <a:buNone/>
-            </a:pPr>
-            <a:r>
-              <a:rPr lang="en-US" sz="1350" b="1" dirty="0">
-                <a:solidFill>
-                  <a:srgbClr val="34D3EE"/>
-                </a:solidFill>
-                <a:latin typeface="Malgun Gothic" pitchFamily="34" charset="0"/>
-                <a:ea typeface="Malgun Gothic" pitchFamily="34" charset="-122"/>
-                <a:cs typeface="Malgun Gothic" pitchFamily="34" charset="-120"/>
-              </a:rPr>
-              <a:t>Key·Value</a:t>
-            </a:r>
-            <a:pPr indent="0" marL="0">
-              <a:lnSpc>
-                <a:spcPct val="105000"/>
-              </a:lnSpc>
-              <a:buNone/>
-            </a:pPr>
-            <a:r>
-              <a:rPr lang="en-US" sz="1350" dirty="0">
-                <a:solidFill>
-                  <a:srgbClr val="D9E3F5"/>
-                </a:solidFill>
-                <a:latin typeface="Malgun Gothic" pitchFamily="34" charset="0"/>
-                <a:ea typeface="Malgun Gothic" pitchFamily="34" charset="-122"/>
-                <a:cs typeface="Malgun Gothic" pitchFamily="34" charset="-120"/>
-              </a:rPr>
-              <a:t>를 저장해 재사용 → 새로 만든 토큰만 계산하면 되어 훨씬 빠릅니다.</a:t>
-            </a:r>
-            <a:endParaRPr lang="en-US" sz="1350" dirty="0"/>
-          </a:p>
-        </p:txBody>
-      </p:sp>
-      <p:sp>
-        <p:nvSpPr>
-          <p:cNvPr id="24" name="Shape 19"/>
-          <p:cNvSpPr/>
-          <p:nvPr/>
-        </p:nvSpPr>
-        <p:spPr>
-          <a:xfrm>
-            <a:off x="548640" y="5504688"/>
-            <a:ext cx="11091672" cy="749808"/>
+            <a:pPr algn="l" indent="0" marL="0">
+              <a:lnSpc>
+                <a:spcPct val="115000"/>
+              </a:lnSpc>
+              <a:buNone/>
+            </a:pPr>
+            <a:r>
+              <a:rPr lang="en-US" sz="1500" b="1" dirty="0">
+                <a:solidFill>
+                  <a:srgbClr val="FFFFFF"/>
+                </a:solidFill>
+                <a:latin typeface="Malgun Gothic" pitchFamily="34" charset="0"/>
+                <a:ea typeface="Malgun Gothic" pitchFamily="34" charset="-122"/>
+                <a:cs typeface="Malgun Gothic" pitchFamily="34" charset="-120"/>
+              </a:rPr>
+              <a:t>재사용 — 매번 새 토큰 하나만 계산</a:t>
+            </a:r>
+            <a:endParaRPr lang="en-US" sz="1500" dirty="0"/>
+          </a:p>
+        </p:txBody>
+      </p:sp>
+      <p:sp>
+        <p:nvSpPr>
+          <p:cNvPr id="64" name="Shape 62"/>
+          <p:cNvSpPr/>
+          <p:nvPr/>
+        </p:nvSpPr>
+        <p:spPr>
+          <a:xfrm>
+            <a:off x="6583680" y="1810512"/>
+            <a:ext cx="4956048" cy="566928"/>
           </a:xfrm>
           <a:prstGeom prst="roundRect">
             <a:avLst>
-              <a:gd name="adj" fmla="val 14634"/>
+              <a:gd name="adj" fmla="val 12903"/>
             </a:avLst>
           </a:prstGeom>
           <a:solidFill>
@@ -1693,58 +2861,757 @@
       </p:sp>
       <p:sp>
         <p:nvSpPr>
-          <p:cNvPr id="25" name="Shape 20"/>
-          <p:cNvSpPr/>
-          <p:nvPr/>
-        </p:nvSpPr>
-        <p:spPr>
-          <a:xfrm>
-            <a:off x="786384" y="5669280"/>
-            <a:ext cx="420624" cy="420624"/>
+          <p:cNvPr id="65" name="Text 63"/>
+          <p:cNvSpPr/>
+          <p:nvPr/>
+        </p:nvSpPr>
+        <p:spPr>
+          <a:xfrm>
+            <a:off x="6748272" y="1810512"/>
+            <a:ext cx="4663440" cy="566928"/>
+          </a:xfrm>
+          <a:prstGeom prst="rect">
+            <a:avLst/>
+          </a:prstGeom>
+          <a:noFill/>
+          <a:ln/>
+        </p:spPr>
+        <p:txBody>
+          <a:bodyPr wrap="square" lIns="0" tIns="0" rIns="0" bIns="0" rtlCol="0" anchor="ctr"/>
+          <a:lstStyle/>
+          <a:p>
+            <a:pPr algn="l" indent="0" marL="0">
+              <a:lnSpc>
+                <a:spcPct val="115000"/>
+              </a:lnSpc>
+              <a:buNone/>
+            </a:pPr>
+            <a:r>
+              <a:rPr lang="en-US" sz="1150" b="1" dirty="0">
+                <a:solidFill>
+                  <a:srgbClr val="FFFFFF"/>
+                </a:solidFill>
+                <a:latin typeface="Malgun Gothic" pitchFamily="34" charset="0"/>
+                <a:ea typeface="Malgun Gothic" pitchFamily="34" charset="-122"/>
+                <a:cs typeface="Malgun Gothic" pitchFamily="34" charset="-120"/>
+              </a:rPr>
+              <a:t>새 토큰 입력</a:t>
+            </a:r>
+            <a:pPr algn="l" indent="0" marL="0">
+              <a:lnSpc>
+                <a:spcPct val="115000"/>
+              </a:lnSpc>
+              <a:buNone/>
+            </a:pPr>
+            <a:r>
+              <a:rPr lang="en-US" sz="1150" dirty="0">
+                <a:solidFill>
+                  <a:srgbClr val="D9E3F5"/>
+                </a:solidFill>
+                <a:latin typeface="Malgun Gothic" pitchFamily="34" charset="0"/>
+                <a:ea typeface="Malgun Gothic" pitchFamily="34" charset="-122"/>
+                <a:cs typeface="Malgun Gothic" pitchFamily="34" charset="-120"/>
+              </a:rPr>
+              <a:t>  →  새 토큰의 Q·K·V만 새로 계산</a:t>
+            </a:r>
+            <a:endParaRPr lang="en-US" sz="1150" dirty="0"/>
+          </a:p>
+        </p:txBody>
+      </p:sp>
+      <p:sp>
+        <p:nvSpPr>
+          <p:cNvPr id="66" name="Shape 64"/>
+          <p:cNvSpPr/>
+          <p:nvPr/>
+        </p:nvSpPr>
+        <p:spPr>
+          <a:xfrm>
+            <a:off x="9061704" y="2377440"/>
+            <a:ext cx="0" cy="201168"/>
+          </a:xfrm>
+          <a:prstGeom prst="line">
+            <a:avLst/>
+          </a:prstGeom>
+          <a:noFill/>
+          <a:ln w="19050">
+            <a:solidFill>
+              <a:srgbClr val="4ADE80"/>
+            </a:solidFill>
+            <a:prstDash val="solid"/>
+            <a:tailEnd type="triangle"/>
+          </a:ln>
+        </p:spPr>
+      </p:sp>
+      <p:sp>
+        <p:nvSpPr>
+          <p:cNvPr id="67" name="Shape 65"/>
+          <p:cNvSpPr/>
+          <p:nvPr/>
+        </p:nvSpPr>
+        <p:spPr>
+          <a:xfrm>
+            <a:off x="6583680" y="2578608"/>
+            <a:ext cx="4956048" cy="566928"/>
+          </a:xfrm>
+          <a:prstGeom prst="roundRect">
+            <a:avLst>
+              <a:gd name="adj" fmla="val 12903"/>
+            </a:avLst>
+          </a:prstGeom>
+          <a:solidFill>
+            <a:srgbClr val="1B2A4A"/>
+          </a:solidFill>
+          <a:ln w="12700">
+            <a:solidFill>
+              <a:srgbClr val="34D3EE"/>
+            </a:solidFill>
+            <a:prstDash val="solid"/>
+          </a:ln>
+        </p:spPr>
+      </p:sp>
+      <p:sp>
+        <p:nvSpPr>
+          <p:cNvPr id="68" name="Text 66"/>
+          <p:cNvSpPr/>
+          <p:nvPr/>
+        </p:nvSpPr>
+        <p:spPr>
+          <a:xfrm>
+            <a:off x="6748272" y="2578608"/>
+            <a:ext cx="4663440" cy="566928"/>
+          </a:xfrm>
+          <a:prstGeom prst="rect">
+            <a:avLst/>
+          </a:prstGeom>
+          <a:noFill/>
+          <a:ln/>
+        </p:spPr>
+        <p:txBody>
+          <a:bodyPr wrap="square" lIns="0" tIns="0" rIns="0" bIns="0" rtlCol="0" anchor="ctr"/>
+          <a:lstStyle/>
+          <a:p>
+            <a:pPr algn="l" indent="0" marL="0">
+              <a:lnSpc>
+                <a:spcPct val="115000"/>
+              </a:lnSpc>
+              <a:buNone/>
+            </a:pPr>
+            <a:r>
+              <a:rPr lang="en-US" sz="1150" b="1" dirty="0">
+                <a:solidFill>
+                  <a:srgbClr val="34D3EE"/>
+                </a:solidFill>
+                <a:latin typeface="Malgun Gothic" pitchFamily="34" charset="0"/>
+                <a:ea typeface="Malgun Gothic" pitchFamily="34" charset="-122"/>
+                <a:cs typeface="Malgun Gothic" pitchFamily="34" charset="-120"/>
+              </a:rPr>
+              <a:t>HBM에서 캐시 읽기</a:t>
+            </a:r>
+            <a:pPr algn="l" indent="0" marL="0">
+              <a:lnSpc>
+                <a:spcPct val="115000"/>
+              </a:lnSpc>
+              <a:buNone/>
+            </a:pPr>
+            <a:r>
+              <a:rPr lang="en-US" sz="1150" dirty="0">
+                <a:solidFill>
+                  <a:srgbClr val="D9E3F5"/>
+                </a:solidFill>
+                <a:latin typeface="Malgun Gothic" pitchFamily="34" charset="0"/>
+                <a:ea typeface="Malgun Gothic" pitchFamily="34" charset="-122"/>
+                <a:cs typeface="Malgun Gothic" pitchFamily="34" charset="-120"/>
+              </a:rPr>
+              <a:t> — 저장된 K1…Kt, V1…Vt 재사용</a:t>
+            </a:r>
+            <a:endParaRPr lang="en-US" sz="1150" dirty="0"/>
+          </a:p>
+        </p:txBody>
+      </p:sp>
+      <p:sp>
+        <p:nvSpPr>
+          <p:cNvPr id="69" name="Shape 67"/>
+          <p:cNvSpPr/>
+          <p:nvPr/>
+        </p:nvSpPr>
+        <p:spPr>
+          <a:xfrm>
+            <a:off x="6035040" y="2862072"/>
+            <a:ext cx="530352" cy="0"/>
+          </a:xfrm>
+          <a:prstGeom prst="line">
+            <a:avLst/>
+          </a:prstGeom>
+          <a:noFill/>
+          <a:ln w="19050">
+            <a:solidFill>
+              <a:srgbClr val="34D3EE"/>
+            </a:solidFill>
+            <a:prstDash val="dash"/>
+            <a:tailEnd type="triangle"/>
+          </a:ln>
+        </p:spPr>
+      </p:sp>
+      <p:sp>
+        <p:nvSpPr>
+          <p:cNvPr id="70" name="Shape 68"/>
+          <p:cNvSpPr/>
+          <p:nvPr/>
+        </p:nvSpPr>
+        <p:spPr>
+          <a:xfrm>
+            <a:off x="9061704" y="3145536"/>
+            <a:ext cx="0" cy="201168"/>
+          </a:xfrm>
+          <a:prstGeom prst="line">
+            <a:avLst/>
+          </a:prstGeom>
+          <a:noFill/>
+          <a:ln w="19050">
+            <a:solidFill>
+              <a:srgbClr val="4ADE80"/>
+            </a:solidFill>
+            <a:prstDash val="solid"/>
+            <a:tailEnd type="triangle"/>
+          </a:ln>
+        </p:spPr>
+      </p:sp>
+      <p:sp>
+        <p:nvSpPr>
+          <p:cNvPr id="71" name="Shape 69"/>
+          <p:cNvSpPr/>
+          <p:nvPr/>
+        </p:nvSpPr>
+        <p:spPr>
+          <a:xfrm>
+            <a:off x="6583680" y="3346704"/>
+            <a:ext cx="4956048" cy="859536"/>
+          </a:xfrm>
+          <a:prstGeom prst="roundRect">
+            <a:avLst>
+              <a:gd name="adj" fmla="val 8511"/>
+            </a:avLst>
+          </a:prstGeom>
+          <a:solidFill>
+            <a:srgbClr val="1B2A4A"/>
+          </a:solidFill>
+          <a:ln/>
+        </p:spPr>
+      </p:sp>
+      <p:sp>
+        <p:nvSpPr>
+          <p:cNvPr id="72" name="Text 70"/>
+          <p:cNvSpPr/>
+          <p:nvPr/>
+        </p:nvSpPr>
+        <p:spPr>
+          <a:xfrm>
+            <a:off x="6748272" y="3419856"/>
+            <a:ext cx="4663440" cy="310896"/>
+          </a:xfrm>
+          <a:prstGeom prst="rect">
+            <a:avLst/>
+          </a:prstGeom>
+          <a:noFill/>
+          <a:ln/>
+        </p:spPr>
+        <p:txBody>
+          <a:bodyPr wrap="square" lIns="0" tIns="0" rIns="0" bIns="0" rtlCol="0" anchor="t"/>
+          <a:lstStyle/>
+          <a:p>
+            <a:pPr algn="l" indent="0" marL="0">
+              <a:lnSpc>
+                <a:spcPct val="115000"/>
+              </a:lnSpc>
+              <a:buNone/>
+            </a:pPr>
+            <a:r>
+              <a:rPr lang="en-US" sz="1150" b="1" dirty="0">
+                <a:solidFill>
+                  <a:srgbClr val="FFFFFF"/>
+                </a:solidFill>
+                <a:latin typeface="Malgun Gothic" pitchFamily="34" charset="0"/>
+                <a:ea typeface="Malgun Gothic" pitchFamily="34" charset="-122"/>
+                <a:cs typeface="Malgun Gothic" pitchFamily="34" charset="-120"/>
+              </a:rPr>
+              <a:t>어텐션 계산 — 이전 토큰 재계산 없음</a:t>
+            </a:r>
+            <a:endParaRPr lang="en-US" sz="1150" dirty="0"/>
+          </a:p>
+        </p:txBody>
+      </p:sp>
+      <p:sp>
+        <p:nvSpPr>
+          <p:cNvPr id="73" name="Text 71"/>
+          <p:cNvSpPr/>
+          <p:nvPr/>
+        </p:nvSpPr>
+        <p:spPr>
+          <a:xfrm>
+            <a:off x="6748272" y="3767328"/>
+            <a:ext cx="4663440" cy="365760"/>
+          </a:xfrm>
+          <a:prstGeom prst="rect">
+            <a:avLst/>
+          </a:prstGeom>
+          <a:noFill/>
+          <a:ln/>
+        </p:spPr>
+        <p:txBody>
+          <a:bodyPr wrap="square" lIns="0" tIns="0" rIns="0" bIns="0" rtlCol="0" anchor="t"/>
+          <a:lstStyle/>
+          <a:p>
+            <a:pPr algn="l" indent="0" marL="0">
+              <a:lnSpc>
+                <a:spcPct val="115000"/>
+              </a:lnSpc>
+              <a:buNone/>
+            </a:pPr>
+            <a:r>
+              <a:rPr lang="en-US" sz="1100" dirty="0">
+                <a:solidFill>
+                  <a:srgbClr val="34D3EE"/>
+                </a:solidFill>
+                <a:latin typeface="Malgun Gothic" pitchFamily="34" charset="0"/>
+                <a:ea typeface="Malgun Gothic" pitchFamily="34" charset="-122"/>
+                <a:cs typeface="Malgun Gothic" pitchFamily="34" charset="-120"/>
+              </a:rPr>
+              <a:t>Q_new × (K1 … Kt) → 가중치 → 가중치 × (V1 … Vt)</a:t>
+            </a:r>
+            <a:endParaRPr lang="en-US" sz="1100" dirty="0"/>
+          </a:p>
+        </p:txBody>
+      </p:sp>
+      <p:sp>
+        <p:nvSpPr>
+          <p:cNvPr id="74" name="Shape 72"/>
+          <p:cNvSpPr/>
+          <p:nvPr/>
+        </p:nvSpPr>
+        <p:spPr>
+          <a:xfrm>
+            <a:off x="9061704" y="4206240"/>
+            <a:ext cx="0" cy="201168"/>
+          </a:xfrm>
+          <a:prstGeom prst="line">
+            <a:avLst/>
+          </a:prstGeom>
+          <a:noFill/>
+          <a:ln w="19050">
+            <a:solidFill>
+              <a:srgbClr val="4ADE80"/>
+            </a:solidFill>
+            <a:prstDash val="solid"/>
+            <a:tailEnd type="triangle"/>
+          </a:ln>
+        </p:spPr>
+      </p:sp>
+      <p:sp>
+        <p:nvSpPr>
+          <p:cNvPr id="75" name="Shape 73"/>
+          <p:cNvSpPr/>
+          <p:nvPr/>
+        </p:nvSpPr>
+        <p:spPr>
+          <a:xfrm>
+            <a:off x="6583680" y="4407408"/>
+            <a:ext cx="4956048" cy="566928"/>
+          </a:xfrm>
+          <a:prstGeom prst="roundRect">
+            <a:avLst>
+              <a:gd name="adj" fmla="val 12903"/>
+            </a:avLst>
+          </a:prstGeom>
+          <a:solidFill>
+            <a:srgbClr val="1B2A4A"/>
+          </a:solidFill>
+          <a:ln w="12700">
+            <a:solidFill>
+              <a:srgbClr val="FBBF24"/>
+            </a:solidFill>
+            <a:prstDash val="solid"/>
+          </a:ln>
+        </p:spPr>
+      </p:sp>
+      <p:sp>
+        <p:nvSpPr>
+          <p:cNvPr id="76" name="Text 74"/>
+          <p:cNvSpPr/>
+          <p:nvPr/>
+        </p:nvSpPr>
+        <p:spPr>
+          <a:xfrm>
+            <a:off x="6748272" y="4407408"/>
+            <a:ext cx="4663440" cy="566928"/>
+          </a:xfrm>
+          <a:prstGeom prst="rect">
+            <a:avLst/>
+          </a:prstGeom>
+          <a:noFill/>
+          <a:ln/>
+        </p:spPr>
+        <p:txBody>
+          <a:bodyPr wrap="square" lIns="0" tIns="0" rIns="0" bIns="0" rtlCol="0" anchor="ctr"/>
+          <a:lstStyle/>
+          <a:p>
+            <a:pPr algn="l" indent="0" marL="0">
+              <a:lnSpc>
+                <a:spcPct val="115000"/>
+              </a:lnSpc>
+              <a:buNone/>
+            </a:pPr>
+            <a:r>
+              <a:rPr lang="en-US" sz="1150" b="1" dirty="0">
+                <a:solidFill>
+                  <a:srgbClr val="4ADE80"/>
+                </a:solidFill>
+                <a:latin typeface="Malgun Gothic" pitchFamily="34" charset="0"/>
+                <a:ea typeface="Malgun Gothic" pitchFamily="34" charset="-122"/>
+                <a:cs typeface="Malgun Gothic" pitchFamily="34" charset="-120"/>
+              </a:rPr>
+              <a:t>다음 토큰 출력</a:t>
+            </a:r>
+            <a:pPr algn="l" indent="0" marL="0">
+              <a:lnSpc>
+                <a:spcPct val="115000"/>
+              </a:lnSpc>
+              <a:buNone/>
+            </a:pPr>
+            <a:r>
+              <a:rPr lang="en-US" sz="1150" dirty="0">
+                <a:solidFill>
+                  <a:srgbClr val="FBBF24"/>
+                </a:solidFill>
+                <a:latin typeface="Malgun Gothic" pitchFamily="34" charset="0"/>
+                <a:ea typeface="Malgun Gothic" pitchFamily="34" charset="-122"/>
+                <a:cs typeface="Malgun Gothic" pitchFamily="34" charset="-120"/>
+              </a:rPr>
+              <a:t>  +  새 K,V 한 칸을 캐시에 추가</a:t>
+            </a:r>
+            <a:endParaRPr lang="en-US" sz="1150" dirty="0"/>
+          </a:p>
+        </p:txBody>
+      </p:sp>
+      <p:sp>
+        <p:nvSpPr>
+          <p:cNvPr id="77" name="Shape 75"/>
+          <p:cNvSpPr/>
+          <p:nvPr/>
+        </p:nvSpPr>
+        <p:spPr>
+          <a:xfrm>
+            <a:off x="6035040" y="4690872"/>
+            <a:ext cx="530352" cy="0"/>
+          </a:xfrm>
+          <a:prstGeom prst="line">
+            <a:avLst/>
+          </a:prstGeom>
+          <a:noFill/>
+          <a:ln w="19050">
+            <a:solidFill>
+              <a:srgbClr val="FBBF24"/>
+            </a:solidFill>
+            <a:prstDash val="dash"/>
+            <a:headEnd type="triangle"/>
+          </a:ln>
+        </p:spPr>
+      </p:sp>
+      <p:sp>
+        <p:nvSpPr>
+          <p:cNvPr id="78" name="Text 76"/>
+          <p:cNvSpPr/>
+          <p:nvPr/>
+        </p:nvSpPr>
+        <p:spPr>
+          <a:xfrm>
+            <a:off x="6583680" y="5065776"/>
+            <a:ext cx="4956048" cy="256032"/>
+          </a:xfrm>
+          <a:prstGeom prst="rect">
+            <a:avLst/>
+          </a:prstGeom>
+          <a:noFill/>
+          <a:ln/>
+        </p:spPr>
+        <p:txBody>
+          <a:bodyPr wrap="square" lIns="0" tIns="0" rIns="0" bIns="0" rtlCol="0" anchor="t"/>
+          <a:lstStyle/>
+          <a:p>
+            <a:pPr algn="l" indent="0" marL="0">
+              <a:lnSpc>
+                <a:spcPct val="115000"/>
+              </a:lnSpc>
+              <a:buNone/>
+            </a:pPr>
+            <a:r>
+              <a:rPr lang="en-US" sz="1050" dirty="0">
+                <a:solidFill>
+                  <a:srgbClr val="9FB3D1"/>
+                </a:solidFill>
+                <a:latin typeface="Malgun Gothic" pitchFamily="34" charset="0"/>
+                <a:ea typeface="Malgun Gothic" pitchFamily="34" charset="-122"/>
+                <a:cs typeface="Malgun Gothic" pitchFamily="34" charset="-120"/>
+              </a:rPr>
+              <a:t>이전 토큰들의 K,V는 다시 계산하지 않습니다 — 그래서 빠릅니다.</a:t>
+            </a:r>
+            <a:endParaRPr lang="en-US" sz="1050" dirty="0"/>
+          </a:p>
+        </p:txBody>
+      </p:sp>
+      <p:sp>
+        <p:nvSpPr>
+          <p:cNvPr id="79" name="Shape 77"/>
+          <p:cNvSpPr/>
+          <p:nvPr/>
+        </p:nvSpPr>
+        <p:spPr>
+          <a:xfrm>
+            <a:off x="658368" y="5705856"/>
+            <a:ext cx="310896" cy="310896"/>
           </a:xfrm>
           <a:prstGeom prst="ellipse">
             <a:avLst/>
           </a:prstGeom>
           <a:solidFill>
+            <a:srgbClr val="FBBF24"/>
+          </a:solidFill>
+          <a:ln/>
+        </p:spPr>
+      </p:sp>
+      <p:sp>
+        <p:nvSpPr>
+          <p:cNvPr id="80" name="Text 78"/>
+          <p:cNvSpPr/>
+          <p:nvPr/>
+        </p:nvSpPr>
+        <p:spPr>
+          <a:xfrm>
+            <a:off x="658368" y="5705856"/>
+            <a:ext cx="310896" cy="310896"/>
+          </a:xfrm>
+          <a:prstGeom prst="rect">
+            <a:avLst/>
+          </a:prstGeom>
+          <a:noFill/>
+          <a:ln/>
+        </p:spPr>
+        <p:txBody>
+          <a:bodyPr wrap="square" lIns="0" tIns="0" rIns="0" bIns="0" rtlCol="0" anchor="ctr"/>
+          <a:lstStyle/>
+          <a:p>
+            <a:pPr algn="ctr" indent="0" marL="0">
+              <a:lnSpc>
+                <a:spcPct val="115000"/>
+              </a:lnSpc>
+              <a:buNone/>
+            </a:pPr>
+            <a:r>
+              <a:rPr lang="en-US" sz="1200" b="1" dirty="0">
+                <a:solidFill>
+                  <a:srgbClr val="0B1220"/>
+                </a:solidFill>
+                <a:latin typeface="Malgun Gothic" pitchFamily="34" charset="0"/>
+                <a:ea typeface="Malgun Gothic" pitchFamily="34" charset="-122"/>
+                <a:cs typeface="Malgun Gothic" pitchFamily="34" charset="-120"/>
+              </a:rPr>
+              <a:t>3</a:t>
+            </a:r>
+            <a:endParaRPr lang="en-US" sz="1200" dirty="0"/>
+          </a:p>
+        </p:txBody>
+      </p:sp>
+      <p:sp>
+        <p:nvSpPr>
+          <p:cNvPr id="81" name="Text 79"/>
+          <p:cNvSpPr/>
+          <p:nvPr/>
+        </p:nvSpPr>
+        <p:spPr>
+          <a:xfrm>
+            <a:off x="1078992" y="5669280"/>
+            <a:ext cx="6217920" cy="347472"/>
+          </a:xfrm>
+          <a:prstGeom prst="rect">
+            <a:avLst/>
+          </a:prstGeom>
+          <a:noFill/>
+          <a:ln/>
+        </p:spPr>
+        <p:txBody>
+          <a:bodyPr wrap="square" lIns="0" tIns="0" rIns="0" bIns="0" rtlCol="0" anchor="t"/>
+          <a:lstStyle/>
+          <a:p>
+            <a:pPr algn="l" indent="0" marL="0">
+              <a:lnSpc>
+                <a:spcPct val="115000"/>
+              </a:lnSpc>
+              <a:buNone/>
+            </a:pPr>
+            <a:r>
+              <a:rPr lang="en-US" sz="1400" b="1" dirty="0">
+                <a:solidFill>
+                  <a:srgbClr val="FFFFFF"/>
+                </a:solidFill>
+                <a:latin typeface="Malgun Gothic" pitchFamily="34" charset="0"/>
+                <a:ea typeface="Malgun Gothic" pitchFamily="34" charset="-122"/>
+                <a:cs typeface="Malgun Gothic" pitchFamily="34" charset="-120"/>
+              </a:rPr>
+              <a:t>비용 — KV 캐시 메모리는 시퀀스 길이에 정비례</a:t>
+            </a:r>
+            <a:endParaRPr lang="en-US" sz="1400" dirty="0"/>
+          </a:p>
+        </p:txBody>
+      </p:sp>
+      <p:sp>
+        <p:nvSpPr>
+          <p:cNvPr id="82" name="Text 80"/>
+          <p:cNvSpPr/>
+          <p:nvPr/>
+        </p:nvSpPr>
+        <p:spPr>
+          <a:xfrm>
+            <a:off x="1078992" y="6053328"/>
+            <a:ext cx="6583680" cy="365760"/>
+          </a:xfrm>
+          <a:prstGeom prst="rect">
+            <a:avLst/>
+          </a:prstGeom>
+          <a:noFill/>
+          <a:ln/>
+        </p:spPr>
+        <p:txBody>
+          <a:bodyPr wrap="square" lIns="0" tIns="0" rIns="0" bIns="0" rtlCol="0" anchor="t"/>
+          <a:lstStyle/>
+          <a:p>
+            <a:pPr algn="l" indent="0" marL="0">
+              <a:lnSpc>
+                <a:spcPct val="115000"/>
+              </a:lnSpc>
+              <a:buNone/>
+            </a:pPr>
+            <a:r>
+              <a:rPr lang="en-US" sz="1200" dirty="0">
+                <a:solidFill>
+                  <a:srgbClr val="D9E3F5"/>
+                </a:solidFill>
+                <a:latin typeface="Malgun Gothic" pitchFamily="34" charset="0"/>
+                <a:ea typeface="Malgun Gothic" pitchFamily="34" charset="-122"/>
+                <a:cs typeface="Malgun Gothic" pitchFamily="34" charset="-120"/>
+              </a:rPr>
+              <a:t>메모리 ≈ 2(K,V) × 레이어 L × 헤드 H × 차원 d × </a:t>
+            </a:r>
+            <a:pPr algn="l" indent="0" marL="0">
+              <a:lnSpc>
+                <a:spcPct val="115000"/>
+              </a:lnSpc>
+              <a:buNone/>
+            </a:pPr>
+            <a:r>
+              <a:rPr lang="en-US" sz="1200" b="1" dirty="0">
+                <a:solidFill>
+                  <a:srgbClr val="FBBF24"/>
+                </a:solidFill>
+                <a:latin typeface="Malgun Gothic" pitchFamily="34" charset="0"/>
+                <a:ea typeface="Malgun Gothic" pitchFamily="34" charset="-122"/>
+                <a:cs typeface="Malgun Gothic" pitchFamily="34" charset="-120"/>
+              </a:rPr>
+              <a:t>시퀀스 길이 t</a:t>
+            </a:r>
+            <a:pPr algn="l" indent="0" marL="0">
+              <a:lnSpc>
+                <a:spcPct val="115000"/>
+              </a:lnSpc>
+              <a:buNone/>
+            </a:pPr>
+            <a:r>
+              <a:rPr lang="en-US" sz="1200" dirty="0">
+                <a:solidFill>
+                  <a:srgbClr val="D9E3F5"/>
+                </a:solidFill>
+                <a:latin typeface="Malgun Gothic" pitchFamily="34" charset="0"/>
+                <a:ea typeface="Malgun Gothic" pitchFamily="34" charset="-122"/>
+                <a:cs typeface="Malgun Gothic" pitchFamily="34" charset="-120"/>
+              </a:rPr>
+              <a:t> × 2B(FP16)</a:t>
+            </a:r>
+            <a:endParaRPr lang="en-US" sz="1200" dirty="0"/>
+          </a:p>
+        </p:txBody>
+      </p:sp>
+      <p:sp>
+        <p:nvSpPr>
+          <p:cNvPr id="83" name="Text 81"/>
+          <p:cNvSpPr/>
+          <p:nvPr/>
+        </p:nvSpPr>
+        <p:spPr>
+          <a:xfrm>
+            <a:off x="7635240" y="5696712"/>
+            <a:ext cx="914400" cy="182880"/>
+          </a:xfrm>
+          <a:prstGeom prst="rect">
+            <a:avLst/>
+          </a:prstGeom>
+          <a:noFill/>
+          <a:ln/>
+        </p:spPr>
+        <p:txBody>
+          <a:bodyPr wrap="square" lIns="0" tIns="0" rIns="0" bIns="0" rtlCol="0" anchor="ctr"/>
+          <a:lstStyle/>
+          <a:p>
+            <a:pPr algn="r" indent="0" marL="0">
+              <a:lnSpc>
+                <a:spcPct val="115000"/>
+              </a:lnSpc>
+              <a:buNone/>
+            </a:pPr>
+            <a:r>
+              <a:rPr lang="en-US" sz="950" dirty="0">
+                <a:solidFill>
+                  <a:srgbClr val="9FB3D1"/>
+                </a:solidFill>
+                <a:latin typeface="Malgun Gothic" pitchFamily="34" charset="0"/>
+                <a:ea typeface="Malgun Gothic" pitchFamily="34" charset="-122"/>
+                <a:cs typeface="Malgun Gothic" pitchFamily="34" charset="-120"/>
+              </a:rPr>
+              <a:t>1K 토큰</a:t>
+            </a:r>
+            <a:endParaRPr lang="en-US" sz="950" dirty="0"/>
+          </a:p>
+        </p:txBody>
+      </p:sp>
+      <p:sp>
+        <p:nvSpPr>
+          <p:cNvPr id="84" name="Shape 82"/>
+          <p:cNvSpPr/>
+          <p:nvPr/>
+        </p:nvSpPr>
+        <p:spPr>
+          <a:xfrm>
+            <a:off x="8641080" y="5696712"/>
+            <a:ext cx="713232" cy="182880"/>
+          </a:xfrm>
+          <a:prstGeom prst="roundRect">
+            <a:avLst>
+              <a:gd name="adj" fmla="val 15000"/>
+            </a:avLst>
+          </a:prstGeom>
+          <a:solidFill>
             <a:srgbClr val="34D3EE"/>
           </a:solidFill>
           <a:ln/>
         </p:spPr>
       </p:sp>
-      <p:pic>
-        <p:nvPicPr>
-          <p:cNvPr id="26" name="Image 3" descr="preencoded.png">    </p:cNvPr>
-          <p:cNvPicPr>
-            <a:picLocks noChangeAspect="1"/>
-          </p:cNvPicPr>
-          <p:nvPr/>
-        </p:nvPicPr>
-        <p:blipFill>
-          <a:blip r:embed="rId4"/>
-          <a:stretch>
-            <a:fillRect/>
-          </a:stretch>
-        </p:blipFill>
-        <p:spPr>
-          <a:xfrm>
-            <a:off x="877824" y="5760720"/>
-            <a:ext cx="237744" cy="237744"/>
-          </a:xfrm>
-          <a:prstGeom prst="rect">
-            <a:avLst/>
-          </a:prstGeom>
-        </p:spPr>
-      </p:pic>
-      <p:sp>
-        <p:nvSpPr>
-          <p:cNvPr id="27" name="Text 21"/>
-          <p:cNvSpPr/>
-          <p:nvPr/>
-        </p:nvSpPr>
-        <p:spPr>
-          <a:xfrm>
-            <a:off x="1371600" y="5504688"/>
-            <a:ext cx="10149840" cy="749808"/>
+      <p:sp>
+        <p:nvSpPr>
+          <p:cNvPr id="85" name="Text 83"/>
+          <p:cNvSpPr/>
+          <p:nvPr/>
+        </p:nvSpPr>
+        <p:spPr>
+          <a:xfrm>
+            <a:off x="7635240" y="5952744"/>
+            <a:ext cx="914400" cy="182880"/>
           </a:xfrm>
           <a:prstGeom prst="rect">
             <a:avLst/>
@@ -1756,53 +3623,14 @@
           <a:bodyPr wrap="square" lIns="0" tIns="0" rIns="0" bIns="0" rtlCol="0" anchor="ctr"/>
           <a:lstStyle/>
           <a:p>
-            <a:pPr indent="0" marL="0">
-              <a:buNone/>
-            </a:pPr>
-            <a:r>
-              <a:rPr lang="en-US" sz="1400" b="1" dirty="0">
-                <a:solidFill>
-                  <a:srgbClr val="34D3EE"/>
-                </a:solidFill>
-                <a:latin typeface="Malgun Gothic" pitchFamily="34" charset="0"/>
-                <a:ea typeface="Malgun Gothic" pitchFamily="34" charset="-122"/>
-                <a:cs typeface="Malgun Gothic" pitchFamily="34" charset="-120"/>
-              </a:rPr>
-              <a:t>핵심 트레이드오프   </a:t>
-            </a:r>
-            <a:pPr indent="0" marL="0">
-              <a:buNone/>
-            </a:pPr>
-            <a:r>
-              <a:rPr lang="en-US" sz="1400" dirty="0">
-                <a:solidFill>
-                  <a:srgbClr val="FFFFFF"/>
-                </a:solidFill>
-                <a:latin typeface="Malgun Gothic" pitchFamily="34" charset="0"/>
-                <a:ea typeface="Malgun Gothic" pitchFamily="34" charset="-122"/>
-                <a:cs typeface="Malgun Gothic" pitchFamily="34" charset="-120"/>
-              </a:rPr>
-              <a:t>생성 속도 </a:t>
-            </a:r>
-            <a:pPr indent="0" marL="0">
-              <a:buNone/>
-            </a:pPr>
-            <a:r>
-              <a:rPr lang="en-US" sz="1400" b="1" dirty="0">
-                <a:solidFill>
-                  <a:srgbClr val="4ADE80"/>
-                </a:solidFill>
-                <a:latin typeface="Malgun Gothic" pitchFamily="34" charset="0"/>
-                <a:ea typeface="Malgun Gothic" pitchFamily="34" charset="-122"/>
-                <a:cs typeface="Malgun Gothic" pitchFamily="34" charset="-120"/>
-              </a:rPr>
-              <a:t>↑ 빨라짐</a:t>
-            </a:r>
-            <a:pPr indent="0" marL="0">
-              <a:buNone/>
-            </a:pPr>
-            <a:r>
-              <a:rPr lang="en-US" sz="1300" dirty="0">
+            <a:pPr algn="r" indent="0" marL="0">
+              <a:lnSpc>
+                <a:spcPct val="115000"/>
+              </a:lnSpc>
+              <a:buNone/>
+            </a:pPr>
+            <a:r>
+              <a:rPr lang="en-US" sz="950" dirty="0">
                 <a:solidFill>
                   <a:srgbClr val="9FB3D1"/>
                 </a:solidFill>
@@ -1810,41 +3638,63 @@
                 <a:ea typeface="Malgun Gothic" pitchFamily="34" charset="-122"/>
                 <a:cs typeface="Malgun Gothic" pitchFamily="34" charset="-120"/>
               </a:rPr>
-              <a:t>   대신   </a:t>
-            </a:r>
-            <a:pPr indent="0" marL="0">
-              <a:buNone/>
-            </a:pPr>
-            <a:r>
-              <a:rPr lang="en-US" sz="1400" dirty="0">
-                <a:solidFill>
-                  <a:srgbClr val="FFFFFF"/>
-                </a:solidFill>
-                <a:latin typeface="Malgun Gothic" pitchFamily="34" charset="0"/>
-                <a:ea typeface="Malgun Gothic" pitchFamily="34" charset="-122"/>
-                <a:cs typeface="Malgun Gothic" pitchFamily="34" charset="-120"/>
-              </a:rPr>
-              <a:t>메모리 사용량 </a:t>
-            </a:r>
-            <a:pPr indent="0" marL="0">
-              <a:buNone/>
-            </a:pPr>
-            <a:r>
-              <a:rPr lang="en-US" sz="1400" b="1" dirty="0">
-                <a:solidFill>
-                  <a:srgbClr val="FBBF24"/>
-                </a:solidFill>
-                <a:latin typeface="Malgun Gothic" pitchFamily="34" charset="0"/>
-                <a:ea typeface="Malgun Gothic" pitchFamily="34" charset="-122"/>
-                <a:cs typeface="Malgun Gothic" pitchFamily="34" charset="-120"/>
-              </a:rPr>
-              <a:t>↑ 증가</a:t>
-            </a:r>
-            <a:pPr indent="0" marL="0">
-              <a:buNone/>
-            </a:pPr>
-            <a:r>
-              <a:rPr lang="en-US" sz="1250" dirty="0">
+              <a:t>2K 토큰</a:t>
+            </a:r>
+            <a:endParaRPr lang="en-US" sz="950" dirty="0"/>
+          </a:p>
+        </p:txBody>
+      </p:sp>
+      <p:sp>
+        <p:nvSpPr>
+          <p:cNvPr id="86" name="Shape 84"/>
+          <p:cNvSpPr/>
+          <p:nvPr/>
+        </p:nvSpPr>
+        <p:spPr>
+          <a:xfrm>
+            <a:off x="8641080" y="5952744"/>
+            <a:ext cx="1426464" cy="182880"/>
+          </a:xfrm>
+          <a:prstGeom prst="roundRect">
+            <a:avLst>
+              <a:gd name="adj" fmla="val 15000"/>
+            </a:avLst>
+          </a:prstGeom>
+          <a:solidFill>
+            <a:srgbClr val="FBBF24"/>
+          </a:solidFill>
+          <a:ln/>
+        </p:spPr>
+      </p:sp>
+      <p:sp>
+        <p:nvSpPr>
+          <p:cNvPr id="87" name="Text 85"/>
+          <p:cNvSpPr/>
+          <p:nvPr/>
+        </p:nvSpPr>
+        <p:spPr>
+          <a:xfrm>
+            <a:off x="7635240" y="6208776"/>
+            <a:ext cx="914400" cy="182880"/>
+          </a:xfrm>
+          <a:prstGeom prst="rect">
+            <a:avLst/>
+          </a:prstGeom>
+          <a:noFill/>
+          <a:ln/>
+        </p:spPr>
+        <p:txBody>
+          <a:bodyPr wrap="square" lIns="0" tIns="0" rIns="0" bIns="0" rtlCol="0" anchor="ctr"/>
+          <a:lstStyle/>
+          <a:p>
+            <a:pPr algn="r" indent="0" marL="0">
+              <a:lnSpc>
+                <a:spcPct val="115000"/>
+              </a:lnSpc>
+              <a:buNone/>
+            </a:pPr>
+            <a:r>
+              <a:rPr lang="en-US" sz="950" dirty="0">
                 <a:solidFill>
                   <a:srgbClr val="9FB3D1"/>
                 </a:solidFill>
@@ -1852,9 +3702,73 @@
                 <a:ea typeface="Malgun Gothic" pitchFamily="34" charset="-122"/>
                 <a:cs typeface="Malgun Gothic" pitchFamily="34" charset="-120"/>
               </a:rPr>
-              <a:t> (문맥이 길수록 커짐)</a:t>
-            </a:r>
-            <a:endParaRPr lang="en-US" sz="1400" dirty="0"/>
+              <a:t>4K 토큰</a:t>
+            </a:r>
+            <a:endParaRPr lang="en-US" sz="950" dirty="0"/>
+          </a:p>
+        </p:txBody>
+      </p:sp>
+      <p:sp>
+        <p:nvSpPr>
+          <p:cNvPr id="88" name="Shape 86"/>
+          <p:cNvSpPr/>
+          <p:nvPr/>
+        </p:nvSpPr>
+        <p:spPr>
+          <a:xfrm>
+            <a:off x="8641080" y="6208776"/>
+            <a:ext cx="2852928" cy="182880"/>
+          </a:xfrm>
+          <a:prstGeom prst="roundRect">
+            <a:avLst>
+              <a:gd name="adj" fmla="val 15000"/>
+            </a:avLst>
+          </a:prstGeom>
+          <a:solidFill>
+            <a:srgbClr val="F87171"/>
+          </a:solidFill>
+          <a:ln/>
+        </p:spPr>
+      </p:sp>
+      <p:sp>
+        <p:nvSpPr>
+          <p:cNvPr id="89" name="Text 87"/>
+          <p:cNvSpPr/>
+          <p:nvPr/>
+        </p:nvSpPr>
+        <p:spPr>
+          <a:xfrm>
+            <a:off x="9464040" y="5696712"/>
+            <a:ext cx="2103120" cy="182880"/>
+          </a:xfrm>
+          <a:prstGeom prst="rect">
+            <a:avLst/>
+          </a:prstGeom>
+          <a:noFill/>
+          <a:ln/>
+        </p:spPr>
+        <p:txBody>
+          <a:bodyPr wrap="square" lIns="0" tIns="0" rIns="0" bIns="0" rtlCol="0" anchor="ctr"/>
+          <a:lstStyle/>
+          <a:p>
+            <a:pPr algn="l" indent="0" marL="0">
+              <a:lnSpc>
+                <a:spcPct val="115000"/>
+              </a:lnSpc>
+              <a:buNone/>
+            </a:pPr>
+            <a:r>
+              <a:rPr lang="en-US" sz="950" dirty="0">
+                <a:solidFill>
+                  <a:srgbClr val="9FB3D1"/>
+                </a:solidFill>
+                <a:latin typeface="Malgun Gothic" pitchFamily="34" charset="0"/>
+                <a:ea typeface="Malgun Gothic" pitchFamily="34" charset="-122"/>
+                <a:cs typeface="Malgun Gothic" pitchFamily="34" charset="-120"/>
+              </a:rPr>
+              <a:t>문맥 2배 → 메모리 2배</a:t>
+            </a:r>
+            <a:endParaRPr lang="en-US" sz="950" dirty="0"/>
           </a:p>
         </p:txBody>
       </p:sp>
